--- a/notas_unidades/unidad1/1_clasificacion_mercados.pptx
+++ b/notas_unidades/unidad1/1_clasificacion_mercados.pptx
@@ -1508,29 +1508,15 @@
 </file>
 
 <file path=ppt/slides/slide1.xml><?xml version="1.0" encoding="utf-8"?>
-<p:sld xmlns:a="http://schemas.openxmlformats.org/drawingml/2006/main" xmlns:r="http://schemas.openxmlformats.org/officeDocument/2006/relationships" xmlns:p="http://schemas.openxmlformats.org/presentationml/2006/main">
-  <p:cSld name="Slide 1">
-    <p:bg>
-      <p:bgPr>
-        <a:solidFill>
-          <a:srgbClr val="1E2761"/>
-        </a:solidFill>
-      </p:bgPr>
-    </p:bg>
+<p:sld xmlns:a="http://schemas.openxmlformats.org/drawingml/2006/main" xmlns:p="http://schemas.openxmlformats.org/presentationml/2006/main" xmlns:r="http://schemas.openxmlformats.org/officeDocument/2006/relationships">
+  <p:cSld>
     <p:spTree>
       <p:nvGrpSpPr>
         <p:cNvPr id="1" name=""/>
         <p:cNvGrpSpPr/>
         <p:nvPr/>
       </p:nvGrpSpPr>
-      <p:grpSpPr>
-        <a:xfrm>
-          <a:off x="0" y="0"/>
-          <a:ext cx="0" cy="0"/>
-          <a:chOff x="0" y="0"/>
-          <a:chExt cx="0" cy="0"/>
-        </a:xfrm>
-      </p:grpSpPr>
+      <p:grpSpPr/>
       <p:sp>
         <p:nvSpPr>
           <p:cNvPr id="2" name="Shape 0"/>
@@ -1654,7 +1640,7 @@
                 <a:ea typeface="Cambria" pitchFamily="34" charset="-122"/>
                 <a:cs typeface="Cambria" pitchFamily="34" charset="-120"/>
               </a:rPr>
-              <a:t>Estructura del Sistema Financiero Mexicano</a:t>
+              <a:t>Clasificación de Activos y Mercados Financieros</a:t>
             </a:r>
             <a:endParaRPr lang="en-US" sz="4000" dirty="0"/>
           </a:p>
@@ -1732,246 +1718,7 @@
                 <a:ea typeface="Calibri" pitchFamily="34" charset="-122"/>
                 <a:cs typeface="Calibri" pitchFamily="34" charset="-120"/>
               </a:rPr>
-              <a:t>Lecciones de Economía Monetaria — G. Mántey de Anguiano (UNAM, 2024)</a:t>
-            </a:r>
-            <a:endParaRPr lang="en-US" sz="1050" dirty="0"/>
-          </a:p>
-        </p:txBody>
-      </p:sp>
-    </p:spTree>
-  </p:cSld>
-  <p:clrMapOvr>
-    <a:masterClrMapping/>
-  </p:clrMapOvr>
-</p:sld>
-</file>
-
-<file path=ppt/slides/slide1.xml><?xml version="1.0" encoding="utf-8"?>
-<p:sld xmlns:a="http://schemas.openxmlformats.org/drawingml/2006/main" xmlns:r="http://schemas.openxmlformats.org/officeDocument/2006/relationships" xmlns:p="http://schemas.openxmlformats.org/presentationml/2006/main">
-  <p:cSld name="Slide 1">
-    <p:bg>
-      <p:bgPr>
-        <a:solidFill>
-          <a:srgbClr val="1E2761"/>
-        </a:solidFill>
-      </p:bgPr>
-    </p:bg>
-    <p:spTree>
-      <p:nvGrpSpPr>
-        <p:cNvPr id="1" name=""/>
-        <p:cNvGrpSpPr/>
-        <p:nvPr/>
-      </p:nvGrpSpPr>
-      <p:grpSpPr>
-        <a:xfrm>
-          <a:off x="0" y="0"/>
-          <a:ext cx="0" cy="0"/>
-          <a:chOff x="0" y="0"/>
-          <a:chExt cx="0" cy="0"/>
-        </a:xfrm>
-      </p:grpSpPr>
-      <p:sp>
-        <p:nvSpPr>
-          <p:cNvPr id="2" name="Shape 0"/>
-          <p:cNvSpPr/>
-          <p:nvPr/>
-        </p:nvSpPr>
-        <p:spPr>
-          <a:xfrm>
-            <a:off x="9692640" y="-1463040"/>
-            <a:ext cx="5029200" cy="5029200"/>
-          </a:xfrm>
-          <a:prstGeom prst="ellipse">
-            <a:avLst/>
-          </a:prstGeom>
-          <a:solidFill>
-            <a:srgbClr val="141B4D"/>
-          </a:solidFill>
-          <a:ln/>
-        </p:spPr>
-        <p:txBody>
-          <a:bodyPr/>
-          <a:p/>
-        </p:txBody>
-      </p:sp>
-      <p:sp>
-        <p:nvSpPr>
-          <p:cNvPr id="3" name="Shape 1"/>
-          <p:cNvSpPr/>
-          <p:nvPr/>
-        </p:nvSpPr>
-        <p:spPr>
-          <a:xfrm>
-            <a:off x="10607040" y="4206240"/>
-            <a:ext cx="3108960" cy="3108960"/>
-          </a:xfrm>
-          <a:prstGeom prst="ellipse">
-            <a:avLst/>
-          </a:prstGeom>
-          <a:solidFill>
-            <a:srgbClr val="141B4D"/>
-          </a:solidFill>
-          <a:ln/>
-        </p:spPr>
-        <p:txBody>
-          <a:bodyPr/>
-          <a:p/>
-        </p:txBody>
-      </p:sp>
-      <p:sp>
-        <p:nvSpPr>
-          <p:cNvPr id="4" name="Text 2"/>
-          <p:cNvSpPr/>
-          <p:nvPr/>
-        </p:nvSpPr>
-        <p:spPr>
-          <a:xfrm>
-            <a:off x="822960" y="2423160"/>
-            <a:ext cx="9144000" cy="365760"/>
-          </a:xfrm>
-          <a:prstGeom prst="rect">
-            <a:avLst/>
-          </a:prstGeom>
-          <a:noFill/>
-          <a:ln/>
-        </p:spPr>
-        <p:txBody>
-          <a:bodyPr wrap="square" rtlCol="0" anchor="ctr"/>
-          <a:lstStyle/>
-          <a:p>
-            <a:pPr indent="0" marL="0">
-              <a:buNone/>
-            </a:pPr>
-            <a:r>
-              <a:rPr lang="en-US" sz="1400" b="1" spc="300" kern="0" dirty="0">
-                <a:solidFill>
-                  <a:srgbClr val="C9A227"/>
-                </a:solidFill>
-                <a:latin typeface="Calibri" pitchFamily="34" charset="0"/>
-                <a:ea typeface="Calibri" pitchFamily="34" charset="-122"/>
-                <a:cs typeface="Calibri" pitchFamily="34" charset="-120"/>
-              </a:rPr>
-              <a:t>MERCADOS DE DEUDA Y CAPITALES</a:t>
-            </a:r>
-            <a:endParaRPr lang="en-US" sz="1400" dirty="0"/>
-          </a:p>
-        </p:txBody>
-      </p:sp>
-      <p:sp>
-        <p:nvSpPr>
-          <p:cNvPr id="5" name="Text 3"/>
-          <p:cNvSpPr/>
-          <p:nvPr/>
-        </p:nvSpPr>
-        <p:spPr>
-          <a:xfrm>
-            <a:off x="777240" y="2926080"/>
-            <a:ext cx="9692640" cy="1417320"/>
-          </a:xfrm>
-          <a:prstGeom prst="rect">
-            <a:avLst/>
-          </a:prstGeom>
-          <a:noFill/>
-          <a:ln/>
-        </p:spPr>
-        <p:txBody>
-          <a:bodyPr wrap="square" lIns="0" tIns="0" rIns="0" bIns="0" rtlCol="0" anchor="ctr"/>
-          <a:lstStyle/>
-          <a:p>
-            <a:pPr indent="0" marL="0">
-              <a:lnSpc>
-                <a:spcPct val="105000"/>
-              </a:lnSpc>
-              <a:buNone/>
-            </a:pPr>
-            <a:r>
-              <a:rPr lang="en-US" sz="4000" b="1" dirty="0">
-                <a:solidFill>
-                  <a:srgbClr val="FFFFFF"/>
-                </a:solidFill>
-                <a:latin typeface="Cambria" pitchFamily="34" charset="0"/>
-                <a:ea typeface="Cambria" pitchFamily="34" charset="-122"/>
-                <a:cs typeface="Cambria" pitchFamily="34" charset="-120"/>
-              </a:rPr>
-              <a:t>Estructura del Sistema Financiero Mexicano</a:t>
-            </a:r>
-            <a:endParaRPr lang="en-US" sz="4000" dirty="0"/>
-          </a:p>
-        </p:txBody>
-      </p:sp>
-      <p:sp>
-        <p:nvSpPr>
-          <p:cNvPr id="6" name="Text 4"/>
-          <p:cNvSpPr/>
-          <p:nvPr/>
-        </p:nvSpPr>
-        <p:spPr>
-          <a:xfrm>
-            <a:off x="822960" y="4462272"/>
-            <a:ext cx="9418320" cy="320040"/>
-          </a:xfrm>
-          <a:prstGeom prst="rect">
-            <a:avLst/>
-          </a:prstGeom>
-          <a:noFill/>
-          <a:ln/>
-        </p:spPr>
-        <p:txBody>
-          <a:bodyPr wrap="square" lIns="0" tIns="0" rIns="0" bIns="0" rtlCol="0" anchor="ctr"/>
-          <a:lstStyle/>
-          <a:p>
-            <a:pPr indent="0" marL="0">
-              <a:buNone/>
-            </a:pPr>
-            <a:r>
-              <a:rPr lang="en-US" sz="1250" i="1" dirty="0">
-                <a:solidFill>
-                  <a:srgbClr val="9BA8DE"/>
-                </a:solidFill>
-                <a:latin typeface="Calibri" pitchFamily="34" charset="0"/>
-                <a:ea typeface="Calibri" pitchFamily="34" charset="-122"/>
-                <a:cs typeface="Calibri" pitchFamily="34" charset="-120"/>
-              </a:rPr>
-              <a:t>Licenciatura en Comercio y Finanzas Internacionales · Universidad Autónoma de Zacatecas</a:t>
-            </a:r>
-            <a:endParaRPr lang="en-US" sz="1250" dirty="0"/>
-          </a:p>
-        </p:txBody>
-      </p:sp>
-      <p:sp>
-        <p:nvSpPr>
-          <p:cNvPr id="7" name="Text 5"/>
-          <p:cNvSpPr/>
-          <p:nvPr/>
-        </p:nvSpPr>
-        <p:spPr>
-          <a:xfrm>
-            <a:off x="822960" y="6263640"/>
-            <a:ext cx="8229600" cy="320040"/>
-          </a:xfrm>
-          <a:prstGeom prst="rect">
-            <a:avLst/>
-          </a:prstGeom>
-          <a:noFill/>
-          <a:ln/>
-        </p:spPr>
-        <p:txBody>
-          <a:bodyPr wrap="square" rtlCol="0" anchor="ctr"/>
-          <a:lstStyle/>
-          <a:p>
-            <a:pPr indent="0" marL="0">
-              <a:buNone/>
-            </a:pPr>
-            <a:r>
-              <a:rPr lang="en-US" sz="1050" i="1" dirty="0">
-                <a:solidFill>
-                  <a:srgbClr val="8894C4"/>
-                </a:solidFill>
-                <a:latin typeface="Calibri" pitchFamily="34" charset="0"/>
-                <a:ea typeface="Calibri" pitchFamily="34" charset="-122"/>
-                <a:cs typeface="Calibri" pitchFamily="34" charset="-120"/>
-              </a:rPr>
-              <a:t>Lecciones de Economía Monetaria — G. Mántey de Anguiano (UNAM, 2024)</a:t>
+              <a:t>Fuentes: Mántey de Anguiano (2024), Mishkin y Eakins (2014)</a:t>
             </a:r>
             <a:endParaRPr lang="en-US" sz="1050" dirty="0"/>
           </a:p>
@@ -3657,22 +3404,15 @@
 </file>
 
 <file path=ppt/slides/slide2.xml><?xml version="1.0" encoding="utf-8"?>
-<p:sld xmlns:a="http://schemas.openxmlformats.org/drawingml/2006/main" xmlns:r="http://schemas.openxmlformats.org/officeDocument/2006/relationships" xmlns:p="http://schemas.openxmlformats.org/presentationml/2006/main">
-  <p:cSld name="Slide 2">
+<p:sld xmlns:a="http://schemas.openxmlformats.org/drawingml/2006/main" xmlns:p="http://schemas.openxmlformats.org/presentationml/2006/main" xmlns:r="http://schemas.openxmlformats.org/officeDocument/2006/relationships">
+  <p:cSld>
     <p:spTree>
       <p:nvGrpSpPr>
         <p:cNvPr id="1" name=""/>
         <p:cNvGrpSpPr/>
         <p:nvPr/>
       </p:nvGrpSpPr>
-      <p:grpSpPr>
-        <a:xfrm>
-          <a:off x="0" y="0"/>
-          <a:ext cx="0" cy="0"/>
-          <a:chOff x="0" y="0"/>
-          <a:chExt cx="0" cy="0"/>
-        </a:xfrm>
-      </p:grpSpPr>
+      <p:grpSpPr/>
       <p:sp>
         <p:nvSpPr>
           <p:cNvPr id="2" name="Text 0"/>
@@ -3706,7 +3446,7 @@
                 <a:ea typeface="Calibri" pitchFamily="34" charset="-122"/>
                 <a:cs typeface="Calibri" pitchFamily="34" charset="-120"/>
               </a:rPr>
-              <a:t>UNIDAD 1 · PANORAMA GENERAL</a:t>
+              <a:t>CLASIFICACIÓN DE MERCADOS · PANORAMA GENERAL</a:t>
             </a:r>
             <a:endParaRPr lang="en-US" sz="1200" dirty="0"/>
           </a:p>
@@ -3745,7 +3485,7 @@
           <p:nvPr/>
         </p:nvPicPr>
         <p:blipFill>
-          <a:blip r:embed="rId1"/>
+          <a:blip r:embed="rId2"/>
           <a:stretch>
             <a:fillRect/>
           </a:stretch>
@@ -3861,7 +3601,7 @@
                 <a:ea typeface="Cambria" pitchFamily="34" charset="-122"/>
                 <a:cs typeface="Cambria" pitchFamily="34" charset="-120"/>
               </a:rPr>
-              <a:t>Que el estudiante entienda </a:t>
+              <a:t>Que el estudiante clasifique un activo financiero según quién lo emite (deuda directa, deuda indirecta o participación de capital) y según su plazo (mercado de dinero o de capitales).</a:t>
             </a:r>
             <a:pPr indent="0" marL="0">
               <a:lnSpc>
@@ -3878,7 +3618,7 @@
                 <a:ea typeface="Cambria" pitchFamily="34" charset="-122"/>
                 <a:cs typeface="Cambria" pitchFamily="34" charset="-120"/>
               </a:rPr>
-              <a:t>el flujo básico del dinero</a:t>
+              <a:t/>
             </a:r>
             <a:pPr indent="0" marL="0">
               <a:lnSpc>
@@ -3895,7 +3635,7 @@
                 <a:ea typeface="Cambria" pitchFamily="34" charset="-122"/>
                 <a:cs typeface="Cambria" pitchFamily="34" charset="-120"/>
               </a:rPr>
-              <a:t> en una economía y cómo está organizado </a:t>
+              <a:t/>
             </a:r>
             <a:pPr indent="0" marL="0">
               <a:lnSpc>
@@ -3912,316 +3652,7 @@
                 <a:ea typeface="Cambria" pitchFamily="34" charset="-122"/>
                 <a:cs typeface="Cambria" pitchFamily="34" charset="-120"/>
               </a:rPr>
-              <a:t>el sistema que lo vigila.</a:t>
-            </a:r>
-            <a:endParaRPr lang="en-US" sz="2400" dirty="0"/>
-          </a:p>
-        </p:txBody>
-      </p:sp>
-      <p:sp>
-        <p:nvSpPr>
-          <p:cNvPr id="8" name="Text 5"/>
-          <p:cNvSpPr/>
-          <p:nvPr/>
-        </p:nvSpPr>
-        <p:spPr>
-          <a:xfrm>
-            <a:off x="11365992" y="6446520"/>
-            <a:ext cx="548640" cy="274320"/>
-          </a:xfrm>
-          <a:prstGeom prst="rect">
-            <a:avLst/>
-          </a:prstGeom>
-          <a:noFill/>
-          <a:ln/>
-        </p:spPr>
-        <p:txBody>
-          <a:bodyPr wrap="square" rtlCol="0" anchor="ctr"/>
-          <a:lstStyle/>
-          <a:p>
-            <a:pPr algn="r" indent="0" marL="0">
-              <a:buNone/>
-            </a:pPr>
-            <a:r>
-              <a:rPr lang="en-US" sz="1000" dirty="0">
-                <a:solidFill>
-                  <a:srgbClr val="A6ADC7"/>
-                </a:solidFill>
-                <a:latin typeface="Calibri" pitchFamily="34" charset="0"/>
-                <a:ea typeface="Calibri" pitchFamily="34" charset="-122"/>
-                <a:cs typeface="Calibri" pitchFamily="34" charset="-120"/>
-              </a:rPr>
-              <a:t>02</a:t>
-            </a:r>
-            <a:endParaRPr lang="en-US" sz="1000" dirty="0"/>
-          </a:p>
-        </p:txBody>
-      </p:sp>
-    </p:spTree>
-  </p:cSld>
-  <p:clrMapOvr>
-    <a:masterClrMapping/>
-  </p:clrMapOvr>
-</p:sld>
-</file>
-
-<file path=ppt/slides/slide2.xml><?xml version="1.0" encoding="utf-8"?>
-<p:sld xmlns:a="http://schemas.openxmlformats.org/drawingml/2006/main" xmlns:r="http://schemas.openxmlformats.org/officeDocument/2006/relationships" xmlns:p="http://schemas.openxmlformats.org/presentationml/2006/main">
-  <p:cSld name="Slide 2">
-    <p:spTree>
-      <p:nvGrpSpPr>
-        <p:cNvPr id="1" name=""/>
-        <p:cNvGrpSpPr/>
-        <p:nvPr/>
-      </p:nvGrpSpPr>
-      <p:grpSpPr>
-        <a:xfrm>
-          <a:off x="0" y="0"/>
-          <a:ext cx="0" cy="0"/>
-          <a:chOff x="0" y="0"/>
-          <a:chExt cx="0" cy="0"/>
-        </a:xfrm>
-      </p:grpSpPr>
-      <p:sp>
-        <p:nvSpPr>
-          <p:cNvPr id="2" name="Text 0"/>
-          <p:cNvSpPr/>
-          <p:nvPr/>
-        </p:nvSpPr>
-        <p:spPr>
-          <a:xfrm>
-            <a:off x="640080" y="457200"/>
-            <a:ext cx="9144000" cy="320040"/>
-          </a:xfrm>
-          <a:prstGeom prst="rect">
-            <a:avLst/>
-          </a:prstGeom>
-          <a:noFill/>
-          <a:ln/>
-        </p:spPr>
-        <p:txBody>
-          <a:bodyPr wrap="square" rtlCol="0" anchor="ctr"/>
-          <a:lstStyle/>
-          <a:p>
-            <a:pPr indent="0" marL="0">
-              <a:buNone/>
-            </a:pPr>
-            <a:r>
-              <a:rPr lang="en-US" sz="1200" b="1" spc="200" kern="0" dirty="0">
-                <a:solidFill>
-                  <a:srgbClr val="C9A227"/>
-                </a:solidFill>
-                <a:latin typeface="Calibri" pitchFamily="34" charset="0"/>
-                <a:ea typeface="Calibri" pitchFamily="34" charset="-122"/>
-                <a:cs typeface="Calibri" pitchFamily="34" charset="-120"/>
-              </a:rPr>
-              <a:t>UNIDAD 1 · PANORAMA GENERAL</a:t>
-            </a:r>
-            <a:endParaRPr lang="en-US" sz="1200" dirty="0"/>
-          </a:p>
-        </p:txBody>
-      </p:sp>
-      <p:sp>
-        <p:nvSpPr>
-          <p:cNvPr id="3" name="Shape 1"/>
-          <p:cNvSpPr/>
-          <p:nvPr/>
-        </p:nvSpPr>
-        <p:spPr>
-          <a:xfrm>
-            <a:off x="10771632" y="457200"/>
-            <a:ext cx="640080" cy="640080"/>
-          </a:xfrm>
-          <a:prstGeom prst="ellipse">
-            <a:avLst/>
-          </a:prstGeom>
-          <a:solidFill>
-            <a:srgbClr val="EEF3FC"/>
-          </a:solidFill>
-          <a:ln/>
-        </p:spPr>
-        <p:txBody>
-          <a:bodyPr/>
-          <a:p/>
-        </p:txBody>
-      </p:sp>
-      <p:pic>
-        <p:nvPicPr>
-          <p:cNvPr id="4" name="Image 0" descr="/tmp/work/deck/icons/bullseye_navy.png">    </p:cNvPr>
-          <p:cNvPicPr>
-            <a:picLocks noChangeAspect="1"/>
-          </p:cNvPicPr>
-          <p:nvPr/>
-        </p:nvPicPr>
-        <p:blipFill>
-          <a:blip r:embed="rId1"/>
-          <a:stretch>
-            <a:fillRect/>
-          </a:stretch>
-        </p:blipFill>
-        <p:spPr>
-          <a:xfrm>
-            <a:off x="10931652" y="617220"/>
-            <a:ext cx="320040" cy="320040"/>
-          </a:xfrm>
-          <a:prstGeom prst="rect">
-            <a:avLst/>
-          </a:prstGeom>
-        </p:spPr>
-      </p:pic>
-      <p:sp>
-        <p:nvSpPr>
-          <p:cNvPr id="5" name="Text 2"/>
-          <p:cNvSpPr/>
-          <p:nvPr/>
-        </p:nvSpPr>
-        <p:spPr>
-          <a:xfrm>
-            <a:off x="640080" y="749808"/>
-            <a:ext cx="9601200" cy="777240"/>
-          </a:xfrm>
-          <a:prstGeom prst="rect">
-            <a:avLst/>
-          </a:prstGeom>
-          <a:noFill/>
-          <a:ln/>
-        </p:spPr>
-        <p:txBody>
-          <a:bodyPr wrap="square" lIns="0" tIns="0" rIns="0" bIns="0" rtlCol="0" anchor="ctr"/>
-          <a:lstStyle/>
-          <a:p>
-            <a:pPr indent="0" marL="0">
-              <a:buNone/>
-            </a:pPr>
-            <a:r>
-              <a:rPr lang="en-US" sz="3200" b="1" dirty="0">
-                <a:solidFill>
-                  <a:srgbClr val="1E2761"/>
-                </a:solidFill>
-                <a:latin typeface="Cambria" pitchFamily="34" charset="0"/>
-                <a:ea typeface="Cambria" pitchFamily="34" charset="-122"/>
-                <a:cs typeface="Cambria" pitchFamily="34" charset="-120"/>
-              </a:rPr>
-              <a:t>Objetivo de la unidad</a:t>
-            </a:r>
-            <a:endParaRPr lang="en-US" sz="3200" dirty="0"/>
-          </a:p>
-        </p:txBody>
-      </p:sp>
-      <p:sp>
-        <p:nvSpPr>
-          <p:cNvPr id="6" name="Shape 3"/>
-          <p:cNvSpPr/>
-          <p:nvPr/>
-        </p:nvSpPr>
-        <p:spPr>
-          <a:xfrm>
-            <a:off x="640080" y="2743200"/>
-            <a:ext cx="10881360" cy="2377440"/>
-          </a:xfrm>
-          <a:prstGeom prst="roundRect">
-            <a:avLst>
-              <a:gd name="adj" fmla="val 3077"/>
-            </a:avLst>
-          </a:prstGeom>
-          <a:solidFill>
-            <a:srgbClr val="EEF3FC"/>
-          </a:solidFill>
-          <a:ln/>
-        </p:spPr>
-        <p:txBody>
-          <a:bodyPr/>
-          <a:p/>
-        </p:txBody>
-      </p:sp>
-      <p:sp>
-        <p:nvSpPr>
-          <p:cNvPr id="7" name="Text 4"/>
-          <p:cNvSpPr/>
-          <p:nvPr/>
-        </p:nvSpPr>
-        <p:spPr>
-          <a:xfrm>
-            <a:off x="1188720" y="2743200"/>
-            <a:ext cx="10058400" cy="2377440"/>
-          </a:xfrm>
-          <a:prstGeom prst="rect">
-            <a:avLst/>
-          </a:prstGeom>
-          <a:noFill/>
-          <a:ln/>
-        </p:spPr>
-        <p:txBody>
-          <a:bodyPr wrap="square" lIns="0" tIns="0" rIns="0" bIns="0" rtlCol="0" anchor="ctr"/>
-          <a:lstStyle/>
-          <a:p>
-            <a:pPr indent="0" marL="0">
-              <a:lnSpc>
-                <a:spcPct val="120000"/>
-              </a:lnSpc>
-              <a:buNone/>
-            </a:pPr>
-            <a:r>
-              <a:rPr lang="en-US" sz="2400" dirty="0">
-                <a:solidFill>
-                  <a:srgbClr val="27314D"/>
-                </a:solidFill>
-                <a:latin typeface="Cambria" pitchFamily="34" charset="0"/>
-                <a:ea typeface="Cambria" pitchFamily="34" charset="-122"/>
-                <a:cs typeface="Cambria" pitchFamily="34" charset="-120"/>
-              </a:rPr>
-              <a:t>Que el estudiante entienda </a:t>
-            </a:r>
-            <a:pPr indent="0" marL="0">
-              <a:lnSpc>
-                <a:spcPct val="120000"/>
-              </a:lnSpc>
-              <a:buNone/>
-            </a:pPr>
-            <a:r>
-              <a:rPr lang="en-US" sz="2400" b="1" dirty="0">
-                <a:solidFill>
-                  <a:srgbClr val="1E2761"/>
-                </a:solidFill>
-                <a:latin typeface="Cambria" pitchFamily="34" charset="0"/>
-                <a:ea typeface="Cambria" pitchFamily="34" charset="-122"/>
-                <a:cs typeface="Cambria" pitchFamily="34" charset="-120"/>
-              </a:rPr>
-              <a:t>el flujo básico del dinero</a:t>
-            </a:r>
-            <a:pPr indent="0" marL="0">
-              <a:lnSpc>
-                <a:spcPct val="120000"/>
-              </a:lnSpc>
-              <a:buNone/>
-            </a:pPr>
-            <a:r>
-              <a:rPr lang="en-US" sz="2400" dirty="0">
-                <a:solidFill>
-                  <a:srgbClr val="27314D"/>
-                </a:solidFill>
-                <a:latin typeface="Cambria" pitchFamily="34" charset="0"/>
-                <a:ea typeface="Cambria" pitchFamily="34" charset="-122"/>
-                <a:cs typeface="Cambria" pitchFamily="34" charset="-120"/>
-              </a:rPr>
-              <a:t> en una economía y cómo está organizado </a:t>
-            </a:r>
-            <a:pPr indent="0" marL="0">
-              <a:lnSpc>
-                <a:spcPct val="120000"/>
-              </a:lnSpc>
-              <a:buNone/>
-            </a:pPr>
-            <a:r>
-              <a:rPr lang="en-US" sz="2400" b="1" dirty="0">
-                <a:solidFill>
-                  <a:srgbClr val="1E2761"/>
-                </a:solidFill>
-                <a:latin typeface="Cambria" pitchFamily="34" charset="0"/>
-                <a:ea typeface="Cambria" pitchFamily="34" charset="-122"/>
-                <a:cs typeface="Cambria" pitchFamily="34" charset="-120"/>
-              </a:rPr>
-              <a:t>el sistema que lo vigila.</a:t>
+              <a:t/>
             </a:r>
             <a:endParaRPr lang="en-US" sz="2400" dirty="0"/>
           </a:p>
@@ -4275,22 +3706,15 @@
 </file>
 
 <file path=ppt/slides/slide3.xml><?xml version="1.0" encoding="utf-8"?>
-<p:sld xmlns:a="http://schemas.openxmlformats.org/drawingml/2006/main" xmlns:r="http://schemas.openxmlformats.org/officeDocument/2006/relationships" xmlns:p="http://schemas.openxmlformats.org/presentationml/2006/main">
-  <p:cSld name="Slide 3">
+<p:sld xmlns:a="http://schemas.openxmlformats.org/drawingml/2006/main" xmlns:p="http://schemas.openxmlformats.org/presentationml/2006/main" xmlns:r="http://schemas.openxmlformats.org/officeDocument/2006/relationships">
+  <p:cSld>
     <p:spTree>
       <p:nvGrpSpPr>
         <p:cNvPr id="1" name=""/>
         <p:cNvGrpSpPr/>
         <p:nvPr/>
       </p:nvGrpSpPr>
-      <p:grpSpPr>
-        <a:xfrm>
-          <a:off x="0" y="0"/>
-          <a:ext cx="0" cy="0"/>
-          <a:chOff x="0" y="0"/>
-          <a:chExt cx="0" cy="0"/>
-        </a:xfrm>
-      </p:grpSpPr>
+      <p:grpSpPr/>
       <p:sp>
         <p:nvSpPr>
           <p:cNvPr id="2" name="Text 0"/>
@@ -4324,7 +3748,7 @@
                 <a:ea typeface="Calibri" pitchFamily="34" charset="-122"/>
                 <a:cs typeface="Calibri" pitchFamily="34" charset="-120"/>
               </a:rPr>
-              <a:t>UNIDAD 1 · PANORAMA GENERAL</a:t>
+              <a:t>CLASIFICACIÓN DE MERCADOS · PANORAMA GENERAL</a:t>
             </a:r>
             <a:endParaRPr lang="en-US" sz="1200" dirty="0"/>
           </a:p>
@@ -4371,1052 +3795,6 @@
       </p:sp>
       <p:sp>
         <p:nvSpPr>
-          <p:cNvPr id="4" name="Shape 2"/>
-          <p:cNvSpPr/>
-          <p:nvPr/>
-        </p:nvSpPr>
-        <p:spPr>
-          <a:xfrm>
-            <a:off x="640080" y="1783080"/>
-            <a:ext cx="10908792" cy="987552"/>
-          </a:xfrm>
-          <a:prstGeom prst="roundRect">
-            <a:avLst>
-              <a:gd name="adj" fmla="val 8333"/>
-            </a:avLst>
-          </a:prstGeom>
-          <a:solidFill>
-            <a:srgbClr val="EEF3FC"/>
-          </a:solidFill>
-          <a:ln/>
-        </p:spPr>
-        <p:txBody>
-          <a:bodyPr/>
-          <a:p/>
-        </p:txBody>
-      </p:sp>
-      <p:sp>
-        <p:nvSpPr>
-          <p:cNvPr id="5" name="Text 3"/>
-          <p:cNvSpPr/>
-          <p:nvPr/>
-        </p:nvSpPr>
-        <p:spPr>
-          <a:xfrm>
-            <a:off x="777240" y="1783080"/>
-            <a:ext cx="777240" cy="987552"/>
-          </a:xfrm>
-          <a:prstGeom prst="rect">
-            <a:avLst/>
-          </a:prstGeom>
-          <a:noFill/>
-          <a:ln/>
-        </p:spPr>
-        <p:txBody>
-          <a:bodyPr wrap="square" lIns="0" tIns="0" rIns="0" bIns="0" rtlCol="0" anchor="ctr"/>
-          <a:lstStyle/>
-          <a:p>
-            <a:pPr algn="ctr" indent="0" marL="0">
-              <a:buNone/>
-            </a:pPr>
-            <a:r>
-              <a:rPr lang="en-US" sz="3000" b="1" dirty="0">
-                <a:solidFill>
-                  <a:srgbClr val="C9A227"/>
-                </a:solidFill>
-                <a:latin typeface="Cambria" pitchFamily="34" charset="0"/>
-                <a:ea typeface="Cambria" pitchFamily="34" charset="-122"/>
-                <a:cs typeface="Cambria" pitchFamily="34" charset="-120"/>
-              </a:rPr>
-              <a:t>I</a:t>
-            </a:r>
-            <a:endParaRPr lang="en-US" sz="3000" dirty="0"/>
-          </a:p>
-        </p:txBody>
-      </p:sp>
-      <p:sp>
-        <p:nvSpPr>
-          <p:cNvPr id="6" name="Shape 4"/>
-          <p:cNvSpPr/>
-          <p:nvPr/>
-        </p:nvSpPr>
-        <p:spPr>
-          <a:xfrm>
-            <a:off x="1691640" y="2020824"/>
-            <a:ext cx="512064" cy="512064"/>
-          </a:xfrm>
-          <a:prstGeom prst="ellipse">
-            <a:avLst/>
-          </a:prstGeom>
-          <a:solidFill>
-            <a:srgbClr val="1E2761"/>
-          </a:solidFill>
-          <a:ln/>
-        </p:spPr>
-        <p:txBody>
-          <a:bodyPr/>
-          <a:p/>
-        </p:txBody>
-      </p:sp>
-      <p:pic>
-        <p:nvPicPr>
-          <p:cNvPr id="7" name="Image 0" descr="/tmp/work/deck/icons/exchange_white.png">    </p:cNvPr>
-          <p:cNvPicPr>
-            <a:picLocks noChangeAspect="1"/>
-          </p:cNvPicPr>
-          <p:nvPr/>
-        </p:nvPicPr>
-        <p:blipFill>
-          <a:blip r:embed="rId1"/>
-          <a:stretch>
-            <a:fillRect/>
-          </a:stretch>
-        </p:blipFill>
-        <p:spPr>
-          <a:xfrm>
-            <a:off x="1814535" y="2143719"/>
-            <a:ext cx="266273" cy="266273"/>
-          </a:xfrm>
-          <a:prstGeom prst="rect">
-            <a:avLst/>
-          </a:prstGeom>
-        </p:spPr>
-      </p:pic>
-      <p:sp>
-        <p:nvSpPr>
-          <p:cNvPr id="8" name="Text 5"/>
-          <p:cNvSpPr/>
-          <p:nvPr/>
-        </p:nvSpPr>
-        <p:spPr>
-          <a:xfrm>
-            <a:off x="2423160" y="1901952"/>
-            <a:ext cx="6766560" cy="329184"/>
-          </a:xfrm>
-          <a:prstGeom prst="rect">
-            <a:avLst/>
-          </a:prstGeom>
-          <a:noFill/>
-          <a:ln/>
-        </p:spPr>
-        <p:txBody>
-          <a:bodyPr wrap="square" lIns="0" tIns="0" rIns="0" bIns="0" rtlCol="0" anchor="ctr"/>
-          <a:lstStyle/>
-          <a:p>
-            <a:pPr indent="0" marL="0">
-              <a:buNone/>
-            </a:pPr>
-            <a:r>
-              <a:rPr lang="en-US" sz="1450" b="1" dirty="0">
-                <a:solidFill>
-                  <a:srgbClr val="1E2761"/>
-                </a:solidFill>
-                <a:latin typeface="Calibri" pitchFamily="34" charset="0"/>
-                <a:ea typeface="Calibri" pitchFamily="34" charset="-122"/>
-                <a:cs typeface="Calibri" pitchFamily="34" charset="-120"/>
-              </a:rPr>
-              <a:t>Intermediación financiera y mercados</a:t>
-            </a:r>
-            <a:endParaRPr lang="en-US" sz="1450" dirty="0"/>
-          </a:p>
-        </p:txBody>
-      </p:sp>
-      <p:sp>
-        <p:nvSpPr>
-          <p:cNvPr id="9" name="Text 6"/>
-          <p:cNvSpPr/>
-          <p:nvPr/>
-        </p:nvSpPr>
-        <p:spPr>
-          <a:xfrm>
-            <a:off x="2423160" y="2240280"/>
-            <a:ext cx="6766560" cy="457200"/>
-          </a:xfrm>
-          <a:prstGeom prst="rect">
-            <a:avLst/>
-          </a:prstGeom>
-          <a:noFill/>
-          <a:ln/>
-        </p:spPr>
-        <p:txBody>
-          <a:bodyPr wrap="square" lIns="0" tIns="0" rIns="0" bIns="0" rtlCol="0" anchor="ctr"/>
-          <a:lstStyle/>
-          <a:p>
-            <a:pPr indent="0" marL="0">
-              <a:lnSpc>
-                <a:spcPct val="110000"/>
-              </a:lnSpc>
-              <a:buNone/>
-            </a:pPr>
-            <a:r>
-              <a:rPr lang="en-US" sz="1050" dirty="0">
-                <a:solidFill>
-                  <a:srgbClr val="5B6482"/>
-                </a:solidFill>
-                <a:latin typeface="Calibri" pitchFamily="34" charset="0"/>
-                <a:ea typeface="Calibri" pitchFamily="34" charset="-122"/>
-                <a:cs typeface="Calibri" pitchFamily="34" charset="-120"/>
-              </a:rPr>
-              <a:t>Activos financieros, agentes, mercado de dinero y de capitales, y canales de crédito</a:t>
-            </a:r>
-            <a:endParaRPr lang="en-US" sz="1050" dirty="0"/>
-          </a:p>
-        </p:txBody>
-      </p:sp>
-      <p:sp>
-        <p:nvSpPr>
-          <p:cNvPr id="10" name="Shape 7"/>
-          <p:cNvSpPr/>
-          <p:nvPr/>
-        </p:nvSpPr>
-        <p:spPr>
-          <a:xfrm>
-            <a:off x="9948672" y="2084832"/>
-            <a:ext cx="1417320" cy="384048"/>
-          </a:xfrm>
-          <a:prstGeom prst="roundRect">
-            <a:avLst>
-              <a:gd name="adj" fmla="val 50000"/>
-            </a:avLst>
-          </a:prstGeom>
-          <a:solidFill>
-            <a:srgbClr val="1E2761"/>
-          </a:solidFill>
-          <a:ln/>
-        </p:spPr>
-        <p:txBody>
-          <a:bodyPr/>
-          <a:p/>
-        </p:txBody>
-      </p:sp>
-      <p:sp>
-        <p:nvSpPr>
-          <p:cNvPr id="11" name="Text 8"/>
-          <p:cNvSpPr/>
-          <p:nvPr/>
-        </p:nvSpPr>
-        <p:spPr>
-          <a:xfrm>
-            <a:off x="9948672" y="2084832"/>
-            <a:ext cx="1417320" cy="384048"/>
-          </a:xfrm>
-          <a:prstGeom prst="rect">
-            <a:avLst/>
-          </a:prstGeom>
-          <a:noFill/>
-          <a:ln/>
-        </p:spPr>
-        <p:txBody>
-          <a:bodyPr wrap="square" lIns="0" tIns="0" rIns="0" bIns="0" rtlCol="0" anchor="ctr"/>
-          <a:lstStyle/>
-          <a:p>
-            <a:pPr algn="ctr" indent="0" marL="0">
-              <a:buNone/>
-            </a:pPr>
-            <a:r>
-              <a:rPr lang="en-US" sz="950" b="1" spc="50" kern="0" dirty="0">
-                <a:solidFill>
-                  <a:srgbClr val="C9A227"/>
-                </a:solidFill>
-                <a:latin typeface="Calibri" pitchFamily="34" charset="0"/>
-                <a:ea typeface="Calibri" pitchFamily="34" charset="-122"/>
-                <a:cs typeface="Calibri" pitchFamily="34" charset="-120"/>
-              </a:rPr>
-              <a:t>PÁG. 5–11</a:t>
-            </a:r>
-            <a:endParaRPr lang="en-US" sz="950" dirty="0"/>
-          </a:p>
-        </p:txBody>
-      </p:sp>
-      <p:sp>
-        <p:nvSpPr>
-          <p:cNvPr id="12" name="Shape 9"/>
-          <p:cNvSpPr/>
-          <p:nvPr/>
-        </p:nvSpPr>
-        <p:spPr>
-          <a:xfrm>
-            <a:off x="640080" y="2953512"/>
-            <a:ext cx="10908792" cy="987552"/>
-          </a:xfrm>
-          <a:prstGeom prst="roundRect">
-            <a:avLst>
-              <a:gd name="adj" fmla="val 8333"/>
-            </a:avLst>
-          </a:prstGeom>
-          <a:solidFill>
-            <a:srgbClr val="FFFFFF"/>
-          </a:solidFill>
-          <a:ln w="12700">
-            <a:solidFill>
-              <a:srgbClr val="E1E7F5"/>
-            </a:solidFill>
-            <a:prstDash val="solid"/>
-          </a:ln>
-        </p:spPr>
-        <p:txBody>
-          <a:bodyPr/>
-          <a:p/>
-        </p:txBody>
-      </p:sp>
-      <p:sp>
-        <p:nvSpPr>
-          <p:cNvPr id="13" name="Text 10"/>
-          <p:cNvSpPr/>
-          <p:nvPr/>
-        </p:nvSpPr>
-        <p:spPr>
-          <a:xfrm>
-            <a:off x="777240" y="2953512"/>
-            <a:ext cx="777240" cy="987552"/>
-          </a:xfrm>
-          <a:prstGeom prst="rect">
-            <a:avLst/>
-          </a:prstGeom>
-          <a:noFill/>
-          <a:ln/>
-        </p:spPr>
-        <p:txBody>
-          <a:bodyPr wrap="square" lIns="0" tIns="0" rIns="0" bIns="0" rtlCol="0" anchor="ctr"/>
-          <a:lstStyle/>
-          <a:p>
-            <a:pPr algn="ctr" indent="0" marL="0">
-              <a:buNone/>
-            </a:pPr>
-            <a:r>
-              <a:rPr lang="en-US" sz="3000" b="1" dirty="0">
-                <a:solidFill>
-                  <a:srgbClr val="C9A227"/>
-                </a:solidFill>
-                <a:latin typeface="Cambria" pitchFamily="34" charset="0"/>
-                <a:ea typeface="Cambria" pitchFamily="34" charset="-122"/>
-                <a:cs typeface="Cambria" pitchFamily="34" charset="-120"/>
-              </a:rPr>
-              <a:t>II</a:t>
-            </a:r>
-            <a:endParaRPr lang="en-US" sz="3000" dirty="0"/>
-          </a:p>
-        </p:txBody>
-      </p:sp>
-      <p:sp>
-        <p:nvSpPr>
-          <p:cNvPr id="14" name="Shape 11"/>
-          <p:cNvSpPr/>
-          <p:nvPr/>
-        </p:nvSpPr>
-        <p:spPr>
-          <a:xfrm>
-            <a:off x="1691640" y="3191256"/>
-            <a:ext cx="512064" cy="512064"/>
-          </a:xfrm>
-          <a:prstGeom prst="ellipse">
-            <a:avLst/>
-          </a:prstGeom>
-          <a:solidFill>
-            <a:srgbClr val="1E2761"/>
-          </a:solidFill>
-          <a:ln/>
-        </p:spPr>
-        <p:txBody>
-          <a:bodyPr/>
-          <a:p/>
-        </p:txBody>
-      </p:sp>
-      <p:pic>
-        <p:nvPicPr>
-          <p:cNvPr id="15" name="Image 1" descr="/tmp/work/deck/icons/sitemap_white.png">    </p:cNvPr>
-          <p:cNvPicPr>
-            <a:picLocks noChangeAspect="1"/>
-          </p:cNvPicPr>
-          <p:nvPr/>
-        </p:nvPicPr>
-        <p:blipFill>
-          <a:blip r:embed="rId2"/>
-          <a:stretch>
-            <a:fillRect/>
-          </a:stretch>
-        </p:blipFill>
-        <p:spPr>
-          <a:xfrm>
-            <a:off x="1814535" y="3314151"/>
-            <a:ext cx="266273" cy="266273"/>
-          </a:xfrm>
-          <a:prstGeom prst="rect">
-            <a:avLst/>
-          </a:prstGeom>
-        </p:spPr>
-      </p:pic>
-      <p:sp>
-        <p:nvSpPr>
-          <p:cNvPr id="16" name="Text 12"/>
-          <p:cNvSpPr/>
-          <p:nvPr/>
-        </p:nvSpPr>
-        <p:spPr>
-          <a:xfrm>
-            <a:off x="2423160" y="3072384"/>
-            <a:ext cx="6766560" cy="329184"/>
-          </a:xfrm>
-          <a:prstGeom prst="rect">
-            <a:avLst/>
-          </a:prstGeom>
-          <a:noFill/>
-          <a:ln/>
-        </p:spPr>
-        <p:txBody>
-          <a:bodyPr wrap="square" lIns="0" tIns="0" rIns="0" bIns="0" rtlCol="0" anchor="ctr"/>
-          <a:lstStyle/>
-          <a:p>
-            <a:pPr indent="0" marL="0">
-              <a:buNone/>
-            </a:pPr>
-            <a:r>
-              <a:rPr lang="en-US" sz="1450" b="1" dirty="0">
-                <a:solidFill>
-                  <a:srgbClr val="1E2761"/>
-                </a:solidFill>
-                <a:latin typeface="Calibri" pitchFamily="34" charset="0"/>
-                <a:ea typeface="Calibri" pitchFamily="34" charset="-122"/>
-                <a:cs typeface="Calibri" pitchFamily="34" charset="-120"/>
-              </a:rPr>
-              <a:t>Estructura del Sistema Financiero Mexicano</a:t>
-            </a:r>
-            <a:endParaRPr lang="en-US" sz="1450" dirty="0"/>
-          </a:p>
-        </p:txBody>
-      </p:sp>
-      <p:sp>
-        <p:nvSpPr>
-          <p:cNvPr id="17" name="Text 13"/>
-          <p:cNvSpPr/>
-          <p:nvPr/>
-        </p:nvSpPr>
-        <p:spPr>
-          <a:xfrm>
-            <a:off x="2423160" y="3410712"/>
-            <a:ext cx="6766560" cy="457200"/>
-          </a:xfrm>
-          <a:prstGeom prst="rect">
-            <a:avLst/>
-          </a:prstGeom>
-          <a:noFill/>
-          <a:ln/>
-        </p:spPr>
-        <p:txBody>
-          <a:bodyPr wrap="square" lIns="0" tIns="0" rIns="0" bIns="0" rtlCol="0" anchor="ctr"/>
-          <a:lstStyle/>
-          <a:p>
-            <a:pPr indent="0" marL="0">
-              <a:lnSpc>
-                <a:spcPct val="110000"/>
-              </a:lnSpc>
-              <a:buNone/>
-            </a:pPr>
-            <a:r>
-              <a:rPr lang="en-US" sz="1050" dirty="0">
-                <a:solidFill>
-                  <a:srgbClr val="5B6482"/>
-                </a:solidFill>
-                <a:latin typeface="Calibri" pitchFamily="34" charset="0"/>
-                <a:ea typeface="Calibri" pitchFamily="34" charset="-122"/>
-                <a:cs typeface="Calibri" pitchFamily="34" charset="-120"/>
-              </a:rPr>
-              <a:t>Reguladores, supervisores y organismos de apoyo y protección</a:t>
-            </a:r>
-            <a:endParaRPr lang="en-US" sz="1050" dirty="0"/>
-          </a:p>
-        </p:txBody>
-      </p:sp>
-      <p:sp>
-        <p:nvSpPr>
-          <p:cNvPr id="18" name="Shape 14"/>
-          <p:cNvSpPr/>
-          <p:nvPr/>
-        </p:nvSpPr>
-        <p:spPr>
-          <a:xfrm>
-            <a:off x="9948672" y="3255264"/>
-            <a:ext cx="1417320" cy="384048"/>
-          </a:xfrm>
-          <a:prstGeom prst="roundRect">
-            <a:avLst>
-              <a:gd name="adj" fmla="val 50000"/>
-            </a:avLst>
-          </a:prstGeom>
-          <a:solidFill>
-            <a:srgbClr val="1E2761"/>
-          </a:solidFill>
-          <a:ln/>
-        </p:spPr>
-        <p:txBody>
-          <a:bodyPr/>
-          <a:p/>
-        </p:txBody>
-      </p:sp>
-      <p:sp>
-        <p:nvSpPr>
-          <p:cNvPr id="19" name="Text 15"/>
-          <p:cNvSpPr/>
-          <p:nvPr/>
-        </p:nvSpPr>
-        <p:spPr>
-          <a:xfrm>
-            <a:off x="9948672" y="3255264"/>
-            <a:ext cx="1417320" cy="384048"/>
-          </a:xfrm>
-          <a:prstGeom prst="rect">
-            <a:avLst/>
-          </a:prstGeom>
-          <a:noFill/>
-          <a:ln/>
-        </p:spPr>
-        <p:txBody>
-          <a:bodyPr wrap="square" lIns="0" tIns="0" rIns="0" bIns="0" rtlCol="0" anchor="ctr"/>
-          <a:lstStyle/>
-          <a:p>
-            <a:pPr algn="ctr" indent="0" marL="0">
-              <a:buNone/>
-            </a:pPr>
-            <a:r>
-              <a:rPr lang="en-US" sz="950" b="1" spc="50" kern="0" dirty="0">
-                <a:solidFill>
-                  <a:srgbClr val="C9A227"/>
-                </a:solidFill>
-                <a:latin typeface="Calibri" pitchFamily="34" charset="0"/>
-                <a:ea typeface="Calibri" pitchFamily="34" charset="-122"/>
-                <a:cs typeface="Calibri" pitchFamily="34" charset="-120"/>
-              </a:rPr>
-              <a:t>PÁG. 12–13</a:t>
-            </a:r>
-            <a:endParaRPr lang="en-US" sz="950" dirty="0"/>
-          </a:p>
-        </p:txBody>
-      </p:sp>
-      <p:sp>
-        <p:nvSpPr>
-          <p:cNvPr id="20" name="Shape 16"/>
-          <p:cNvSpPr/>
-          <p:nvPr/>
-        </p:nvSpPr>
-        <p:spPr>
-          <a:xfrm>
-            <a:off x="640080" y="4123944"/>
-            <a:ext cx="10908792" cy="987552"/>
-          </a:xfrm>
-          <a:prstGeom prst="roundRect">
-            <a:avLst>
-              <a:gd name="adj" fmla="val 8333"/>
-            </a:avLst>
-          </a:prstGeom>
-          <a:solidFill>
-            <a:srgbClr val="EEF3FC"/>
-          </a:solidFill>
-          <a:ln/>
-        </p:spPr>
-        <p:txBody>
-          <a:bodyPr/>
-          <a:p/>
-        </p:txBody>
-      </p:sp>
-      <p:sp>
-        <p:nvSpPr>
-          <p:cNvPr id="21" name="Text 17"/>
-          <p:cNvSpPr/>
-          <p:nvPr/>
-        </p:nvSpPr>
-        <p:spPr>
-          <a:xfrm>
-            <a:off x="777240" y="4123944"/>
-            <a:ext cx="777240" cy="987552"/>
-          </a:xfrm>
-          <a:prstGeom prst="rect">
-            <a:avLst/>
-          </a:prstGeom>
-          <a:noFill/>
-          <a:ln/>
-        </p:spPr>
-        <p:txBody>
-          <a:bodyPr wrap="square" lIns="0" tIns="0" rIns="0" bIns="0" rtlCol="0" anchor="ctr"/>
-          <a:lstStyle/>
-          <a:p>
-            <a:pPr algn="ctr" indent="0" marL="0">
-              <a:buNone/>
-            </a:pPr>
-            <a:r>
-              <a:rPr lang="en-US" sz="3000" b="1" dirty="0">
-                <a:solidFill>
-                  <a:srgbClr val="C9A227"/>
-                </a:solidFill>
-                <a:latin typeface="Cambria" pitchFamily="34" charset="0"/>
-                <a:ea typeface="Cambria" pitchFamily="34" charset="-122"/>
-                <a:cs typeface="Cambria" pitchFamily="34" charset="-120"/>
-              </a:rPr>
-              <a:t>III</a:t>
-            </a:r>
-            <a:endParaRPr lang="en-US" sz="3000" dirty="0"/>
-          </a:p>
-        </p:txBody>
-      </p:sp>
-      <p:sp>
-        <p:nvSpPr>
-          <p:cNvPr id="22" name="Shape 18"/>
-          <p:cNvSpPr/>
-          <p:nvPr/>
-        </p:nvSpPr>
-        <p:spPr>
-          <a:xfrm>
-            <a:off x="1691640" y="4361688"/>
-            <a:ext cx="512064" cy="512064"/>
-          </a:xfrm>
-          <a:prstGeom prst="ellipse">
-            <a:avLst/>
-          </a:prstGeom>
-          <a:solidFill>
-            <a:srgbClr val="1E2761"/>
-          </a:solidFill>
-          <a:ln/>
-        </p:spPr>
-        <p:txBody>
-          <a:bodyPr/>
-          <a:p/>
-        </p:txBody>
-      </p:sp>
-      <p:pic>
-        <p:nvPicPr>
-          <p:cNvPr id="23" name="Image 2" descr="/tmp/work/deck/icons/users_white.png">    </p:cNvPr>
-          <p:cNvPicPr>
-            <a:picLocks noChangeAspect="1"/>
-          </p:cNvPicPr>
-          <p:nvPr/>
-        </p:nvPicPr>
-        <p:blipFill>
-          <a:blip r:embed="rId3"/>
-          <a:stretch>
-            <a:fillRect/>
-          </a:stretch>
-        </p:blipFill>
-        <p:spPr>
-          <a:xfrm>
-            <a:off x="1814535" y="4484583"/>
-            <a:ext cx="266273" cy="266273"/>
-          </a:xfrm>
-          <a:prstGeom prst="rect">
-            <a:avLst/>
-          </a:prstGeom>
-        </p:spPr>
-      </p:pic>
-      <p:sp>
-        <p:nvSpPr>
-          <p:cNvPr id="24" name="Text 19"/>
-          <p:cNvSpPr/>
-          <p:nvPr/>
-        </p:nvSpPr>
-        <p:spPr>
-          <a:xfrm>
-            <a:off x="2423160" y="4242816"/>
-            <a:ext cx="6766560" cy="329184"/>
-          </a:xfrm>
-          <a:prstGeom prst="rect">
-            <a:avLst/>
-          </a:prstGeom>
-          <a:noFill/>
-          <a:ln/>
-        </p:spPr>
-        <p:txBody>
-          <a:bodyPr wrap="square" lIns="0" tIns="0" rIns="0" bIns="0" rtlCol="0" anchor="ctr"/>
-          <a:lstStyle/>
-          <a:p>
-            <a:pPr indent="0" marL="0">
-              <a:buNone/>
-            </a:pPr>
-            <a:r>
-              <a:rPr lang="en-US" sz="1450" b="1" dirty="0">
-                <a:solidFill>
-                  <a:srgbClr val="1E2761"/>
-                </a:solidFill>
-                <a:latin typeface="Calibri" pitchFamily="34" charset="0"/>
-                <a:ea typeface="Calibri" pitchFamily="34" charset="-122"/>
-                <a:cs typeface="Calibri" pitchFamily="34" charset="-120"/>
-              </a:rPr>
-              <a:t>Taller práctico</a:t>
-            </a:r>
-            <a:endParaRPr lang="en-US" sz="1450" dirty="0"/>
-          </a:p>
-        </p:txBody>
-      </p:sp>
-      <p:sp>
-        <p:nvSpPr>
-          <p:cNvPr id="25" name="Text 20"/>
-          <p:cNvSpPr/>
-          <p:nvPr/>
-        </p:nvSpPr>
-        <p:spPr>
-          <a:xfrm>
-            <a:off x="2423160" y="4581144"/>
-            <a:ext cx="6766560" cy="457200"/>
-          </a:xfrm>
-          <a:prstGeom prst="rect">
-            <a:avLst/>
-          </a:prstGeom>
-          <a:noFill/>
-          <a:ln/>
-        </p:spPr>
-        <p:txBody>
-          <a:bodyPr wrap="square" lIns="0" tIns="0" rIns="0" bIns="0" rtlCol="0" anchor="ctr"/>
-          <a:lstStyle/>
-          <a:p>
-            <a:pPr indent="0" marL="0">
-              <a:lnSpc>
-                <a:spcPct val="110000"/>
-              </a:lnSpc>
-              <a:buNone/>
-            </a:pPr>
-            <a:r>
-              <a:rPr lang="en-US" sz="1050" dirty="0">
-                <a:solidFill>
-                  <a:srgbClr val="5B6482"/>
-                </a:solidFill>
-                <a:latin typeface="Calibri" pitchFamily="34" charset="0"/>
-                <a:ea typeface="Calibri" pitchFamily="34" charset="-122"/>
-                <a:cs typeface="Calibri" pitchFamily="34" charset="-120"/>
-              </a:rPr>
-              <a:t>Mapeo institucional y análisis de casos reales aplicando los conceptos vistos</a:t>
-            </a:r>
-            <a:endParaRPr lang="en-US" sz="1050" dirty="0"/>
-          </a:p>
-        </p:txBody>
-      </p:sp>
-      <p:sp>
-        <p:nvSpPr>
-          <p:cNvPr id="26" name="Shape 21"/>
-          <p:cNvSpPr/>
-          <p:nvPr/>
-        </p:nvSpPr>
-        <p:spPr>
-          <a:xfrm>
-            <a:off x="9948672" y="4425696"/>
-            <a:ext cx="1417320" cy="384048"/>
-          </a:xfrm>
-          <a:prstGeom prst="roundRect">
-            <a:avLst>
-              <a:gd name="adj" fmla="val 50000"/>
-            </a:avLst>
-          </a:prstGeom>
-          <a:solidFill>
-            <a:srgbClr val="1E2761"/>
-          </a:solidFill>
-          <a:ln/>
-        </p:spPr>
-        <p:txBody>
-          <a:bodyPr/>
-          <a:p/>
-        </p:txBody>
-      </p:sp>
-      <p:sp>
-        <p:nvSpPr>
-          <p:cNvPr id="27" name="Text 22"/>
-          <p:cNvSpPr/>
-          <p:nvPr/>
-        </p:nvSpPr>
-        <p:spPr>
-          <a:xfrm>
-            <a:off x="9948672" y="4425696"/>
-            <a:ext cx="1417320" cy="384048"/>
-          </a:xfrm>
-          <a:prstGeom prst="rect">
-            <a:avLst/>
-          </a:prstGeom>
-          <a:noFill/>
-          <a:ln/>
-        </p:spPr>
-        <p:txBody>
-          <a:bodyPr wrap="square" lIns="0" tIns="0" rIns="0" bIns="0" rtlCol="0" anchor="ctr"/>
-          <a:lstStyle/>
-          <a:p>
-            <a:pPr algn="ctr" indent="0" marL="0">
-              <a:buNone/>
-            </a:pPr>
-            <a:r>
-              <a:rPr lang="en-US" sz="950" b="1" spc="50" kern="0" dirty="0">
-                <a:solidFill>
-                  <a:srgbClr val="C9A227"/>
-                </a:solidFill>
-                <a:latin typeface="Calibri" pitchFamily="34" charset="0"/>
-                <a:ea typeface="Calibri" pitchFamily="34" charset="-122"/>
-                <a:cs typeface="Calibri" pitchFamily="34" charset="-120"/>
-              </a:rPr>
-              <a:t>PÁG. 15–16</a:t>
-            </a:r>
-            <a:endParaRPr lang="en-US" sz="950" dirty="0"/>
-          </a:p>
-        </p:txBody>
-      </p:sp>
-      <p:sp>
-        <p:nvSpPr>
-          <p:cNvPr id="28" name="Shape 23"/>
-          <p:cNvSpPr/>
-          <p:nvPr/>
-        </p:nvSpPr>
-        <p:spPr>
-          <a:xfrm>
-            <a:off x="640080" y="5294376"/>
-            <a:ext cx="10908792" cy="987552"/>
-          </a:xfrm>
-          <a:prstGeom prst="roundRect">
-            <a:avLst>
-              <a:gd name="adj" fmla="val 8333"/>
-            </a:avLst>
-          </a:prstGeom>
-          <a:solidFill>
-            <a:srgbClr val="FFFFFF"/>
-          </a:solidFill>
-          <a:ln w="12700">
-            <a:solidFill>
-              <a:srgbClr val="E1E7F5"/>
-            </a:solidFill>
-            <a:prstDash val="solid"/>
-          </a:ln>
-        </p:spPr>
-        <p:txBody>
-          <a:bodyPr/>
-          <a:p/>
-        </p:txBody>
-      </p:sp>
-      <p:sp>
-        <p:nvSpPr>
-          <p:cNvPr id="29" name="Text 24"/>
-          <p:cNvSpPr/>
-          <p:nvPr/>
-        </p:nvSpPr>
-        <p:spPr>
-          <a:xfrm>
-            <a:off x="777240" y="5294376"/>
-            <a:ext cx="777240" cy="987552"/>
-          </a:xfrm>
-          <a:prstGeom prst="rect">
-            <a:avLst/>
-          </a:prstGeom>
-          <a:noFill/>
-          <a:ln/>
-        </p:spPr>
-        <p:txBody>
-          <a:bodyPr wrap="square" lIns="0" tIns="0" rIns="0" bIns="0" rtlCol="0" anchor="ctr"/>
-          <a:lstStyle/>
-          <a:p>
-            <a:pPr algn="ctr" indent="0" marL="0">
-              <a:buNone/>
-            </a:pPr>
-            <a:r>
-              <a:rPr lang="en-US" sz="3000" b="1" dirty="0">
-                <a:solidFill>
-                  <a:srgbClr val="C9A227"/>
-                </a:solidFill>
-                <a:latin typeface="Cambria" pitchFamily="34" charset="0"/>
-                <a:ea typeface="Cambria" pitchFamily="34" charset="-122"/>
-                <a:cs typeface="Cambria" pitchFamily="34" charset="-120"/>
-              </a:rPr>
-              <a:t>IV</a:t>
-            </a:r>
-            <a:endParaRPr lang="en-US" sz="3000" dirty="0"/>
-          </a:p>
-        </p:txBody>
-      </p:sp>
-      <p:sp>
-        <p:nvSpPr>
-          <p:cNvPr id="30" name="Shape 25"/>
-          <p:cNvSpPr/>
-          <p:nvPr/>
-        </p:nvSpPr>
-        <p:spPr>
-          <a:xfrm>
-            <a:off x="1691640" y="5532120"/>
-            <a:ext cx="512064" cy="512064"/>
-          </a:xfrm>
-          <a:prstGeom prst="ellipse">
-            <a:avLst/>
-          </a:prstGeom>
-          <a:solidFill>
-            <a:srgbClr val="1E2761"/>
-          </a:solidFill>
-          <a:ln/>
-        </p:spPr>
-        <p:txBody>
-          <a:bodyPr/>
-          <a:p/>
-        </p:txBody>
-      </p:sp>
-      <p:pic>
-        <p:nvPicPr>
-          <p:cNvPr id="31" name="Image 3" descr="/tmp/work/deck/icons/bookopen_white.png">    </p:cNvPr>
-          <p:cNvPicPr>
-            <a:picLocks noChangeAspect="1"/>
-          </p:cNvPicPr>
-          <p:nvPr/>
-        </p:nvPicPr>
-        <p:blipFill>
-          <a:blip r:embed="rId4"/>
-          <a:stretch>
-            <a:fillRect/>
-          </a:stretch>
-        </p:blipFill>
-        <p:spPr>
-          <a:xfrm>
-            <a:off x="1814535" y="5655015"/>
-            <a:ext cx="266273" cy="266273"/>
-          </a:xfrm>
-          <a:prstGeom prst="rect">
-            <a:avLst/>
-          </a:prstGeom>
-        </p:spPr>
-      </p:pic>
-      <p:sp>
-        <p:nvSpPr>
-          <p:cNvPr id="32" name="Text 26"/>
-          <p:cNvSpPr/>
-          <p:nvPr/>
-        </p:nvSpPr>
-        <p:spPr>
-          <a:xfrm>
-            <a:off x="2423160" y="5413248"/>
-            <a:ext cx="6766560" cy="329184"/>
-          </a:xfrm>
-          <a:prstGeom prst="rect">
-            <a:avLst/>
-          </a:prstGeom>
-          <a:noFill/>
-          <a:ln/>
-        </p:spPr>
-        <p:txBody>
-          <a:bodyPr wrap="square" lIns="0" tIns="0" rIns="0" bIns="0" rtlCol="0" anchor="ctr"/>
-          <a:lstStyle/>
-          <a:p>
-            <a:pPr indent="0" marL="0">
-              <a:buNone/>
-            </a:pPr>
-            <a:r>
-              <a:rPr lang="en-US" sz="1450" b="1" dirty="0">
-                <a:solidFill>
-                  <a:srgbClr val="1E2761"/>
-                </a:solidFill>
-                <a:latin typeface="Calibri" pitchFamily="34" charset="0"/>
-                <a:ea typeface="Calibri" pitchFamily="34" charset="-122"/>
-                <a:cs typeface="Calibri" pitchFamily="34" charset="-120"/>
-              </a:rPr>
-              <a:t>Fuentes y referencias</a:t>
-            </a:r>
-            <a:endParaRPr lang="en-US" sz="1450" dirty="0"/>
-          </a:p>
-        </p:txBody>
-      </p:sp>
-      <p:sp>
-        <p:nvSpPr>
-          <p:cNvPr id="33" name="Text 27"/>
-          <p:cNvSpPr/>
-          <p:nvPr/>
-        </p:nvSpPr>
-        <p:spPr>
-          <a:xfrm>
-            <a:off x="2423160" y="5751576"/>
-            <a:ext cx="6766560" cy="457200"/>
-          </a:xfrm>
-          <a:prstGeom prst="rect">
-            <a:avLst/>
-          </a:prstGeom>
-          <a:noFill/>
-          <a:ln/>
-        </p:spPr>
-        <p:txBody>
-          <a:bodyPr wrap="square" lIns="0" tIns="0" rIns="0" bIns="0" rtlCol="0" anchor="ctr"/>
-          <a:lstStyle/>
-          <a:p>
-            <a:pPr indent="0" marL="0">
-              <a:lnSpc>
-                <a:spcPct val="110000"/>
-              </a:lnSpc>
-              <a:buNone/>
-            </a:pPr>
-            <a:r>
-              <a:rPr lang="en-US" sz="1050" dirty="0">
-                <a:solidFill>
-                  <a:srgbClr val="5B6482"/>
-                </a:solidFill>
-                <a:latin typeface="Calibri" pitchFamily="34" charset="0"/>
-                <a:ea typeface="Calibri" pitchFamily="34" charset="-122"/>
-                <a:cs typeface="Calibri" pitchFamily="34" charset="-120"/>
-              </a:rPr>
-              <a:t>Bibliografía del curso y portales oficiales de consulta</a:t>
-            </a:r>
-            <a:endParaRPr lang="en-US" sz="1050" dirty="0"/>
-          </a:p>
-        </p:txBody>
-      </p:sp>
-      <p:sp>
-        <p:nvSpPr>
-          <p:cNvPr id="34" name="Shape 28"/>
-          <p:cNvSpPr/>
-          <p:nvPr/>
-        </p:nvSpPr>
-        <p:spPr>
-          <a:xfrm>
-            <a:off x="9948672" y="5596128"/>
-            <a:ext cx="1417320" cy="384048"/>
-          </a:xfrm>
-          <a:prstGeom prst="roundRect">
-            <a:avLst>
-              <a:gd name="adj" fmla="val 50000"/>
-            </a:avLst>
-          </a:prstGeom>
-          <a:solidFill>
-            <a:srgbClr val="1E2761"/>
-          </a:solidFill>
-          <a:ln/>
-        </p:spPr>
-        <p:txBody>
-          <a:bodyPr/>
-          <a:p/>
-        </p:txBody>
-      </p:sp>
-      <p:sp>
-        <p:nvSpPr>
-          <p:cNvPr id="35" name="Text 29"/>
-          <p:cNvSpPr/>
-          <p:nvPr/>
-        </p:nvSpPr>
-        <p:spPr>
-          <a:xfrm>
-            <a:off x="9948672" y="5596128"/>
-            <a:ext cx="1417320" cy="384048"/>
-          </a:xfrm>
-          <a:prstGeom prst="rect">
-            <a:avLst/>
-          </a:prstGeom>
-          <a:noFill/>
-          <a:ln/>
-        </p:spPr>
-        <p:txBody>
-          <a:bodyPr wrap="square" lIns="0" tIns="0" rIns="0" bIns="0" rtlCol="0" anchor="ctr"/>
-          <a:lstStyle/>
-          <a:p>
-            <a:pPr algn="ctr" indent="0" marL="0">
-              <a:buNone/>
-            </a:pPr>
-            <a:r>
-              <a:rPr lang="en-US" sz="950" b="1" spc="50" kern="0" dirty="0">
-                <a:solidFill>
-                  <a:srgbClr val="C9A227"/>
-                </a:solidFill>
-                <a:latin typeface="Calibri" pitchFamily="34" charset="0"/>
-                <a:ea typeface="Calibri" pitchFamily="34" charset="-122"/>
-                <a:cs typeface="Calibri" pitchFamily="34" charset="-120"/>
-              </a:rPr>
-              <a:t>PÁG. 17</a:t>
-            </a:r>
-            <a:endParaRPr lang="en-US" sz="950" dirty="0"/>
-          </a:p>
-        </p:txBody>
-      </p:sp>
-      <p:sp>
-        <p:nvSpPr>
           <p:cNvPr id="36" name="Text 30"/>
           <p:cNvSpPr/>
           <p:nvPr/>
@@ -5454,1191 +3832,315 @@
           </a:p>
         </p:txBody>
       </p:sp>
-    </p:spTree>
-  </p:cSld>
-  <p:clrMapOvr>
-    <a:masterClrMapping/>
-  </p:clrMapOvr>
-</p:sld>
-</file>
-
-<file path=ppt/slides/slide3.xml><?xml version="1.0" encoding="utf-8"?>
-<p:sld xmlns:a="http://schemas.openxmlformats.org/drawingml/2006/main" xmlns:r="http://schemas.openxmlformats.org/officeDocument/2006/relationships" xmlns:p="http://schemas.openxmlformats.org/presentationml/2006/main">
-  <p:cSld name="Slide 3">
-    <p:spTree>
-      <p:nvGrpSpPr>
-        <p:cNvPr id="1" name=""/>
-        <p:cNvGrpSpPr/>
-        <p:nvPr/>
-      </p:nvGrpSpPr>
-      <p:grpSpPr>
-        <a:xfrm>
-          <a:off x="0" y="0"/>
-          <a:ext cx="0" cy="0"/>
-          <a:chOff x="0" y="0"/>
-          <a:chExt cx="0" cy="0"/>
-        </a:xfrm>
-      </p:grpSpPr>
-      <p:sp>
-        <p:nvSpPr>
-          <p:cNvPr id="2" name="Text 0"/>
-          <p:cNvSpPr/>
-          <p:nvPr/>
-        </p:nvSpPr>
-        <p:spPr>
-          <a:xfrm>
-            <a:off x="640080" y="457200"/>
-            <a:ext cx="9144000" cy="320040"/>
-          </a:xfrm>
-          <a:prstGeom prst="rect">
-            <a:avLst/>
-          </a:prstGeom>
-          <a:noFill/>
-          <a:ln/>
-        </p:spPr>
-        <p:txBody>
-          <a:bodyPr wrap="square" rtlCol="0" anchor="ctr"/>
-          <a:lstStyle/>
-          <a:p>
-            <a:pPr indent="0" marL="0">
-              <a:buNone/>
-            </a:pPr>
-            <a:r>
-              <a:rPr lang="en-US" sz="1200" b="1" spc="200" kern="0" dirty="0">
+      <p:sp>
+        <p:nvSpPr>
+          <p:cNvPr id="37" name="TextBox 36"/>
+          <p:cNvSpPr txBox="1"/>
+          <p:nvPr/>
+        </p:nvSpPr>
+        <p:spPr>
+          <a:xfrm>
+            <a:off x="777240" y="1783080"/>
+            <a:ext cx="8321040" cy="384048"/>
+          </a:xfrm>
+          <a:prstGeom prst="rect">
+            <a:avLst/>
+          </a:prstGeom>
+          <a:noFill/>
+        </p:spPr>
+        <p:txBody>
+          <a:bodyPr wrap="square">
+            <a:spAutoFit/>
+          </a:bodyPr>
+          <a:lstStyle/>
+          <a:p>
+            <a:r>
+              <a:rPr sz="1500" b="1" i="0">
                 <a:solidFill>
                   <a:srgbClr val="C9A227"/>
                 </a:solidFill>
-                <a:latin typeface="Calibri" pitchFamily="34" charset="0"/>
-                <a:ea typeface="Calibri" pitchFamily="34" charset="-122"/>
-                <a:cs typeface="Calibri" pitchFamily="34" charset="-120"/>
-              </a:rPr>
-              <a:t>UNIDAD 1 · PANORAMA GENERAL</a:t>
-            </a:r>
-            <a:endParaRPr lang="en-US" sz="1200" dirty="0"/>
-          </a:p>
-        </p:txBody>
-      </p:sp>
-      <p:sp>
-        <p:nvSpPr>
-          <p:cNvPr id="3" name="Text 1"/>
-          <p:cNvSpPr/>
-          <p:nvPr/>
-        </p:nvSpPr>
-        <p:spPr>
-          <a:xfrm>
-            <a:off x="640080" y="749808"/>
-            <a:ext cx="9601200" cy="777240"/>
-          </a:xfrm>
-          <a:prstGeom prst="rect">
-            <a:avLst/>
-          </a:prstGeom>
-          <a:noFill/>
-          <a:ln/>
-        </p:spPr>
-        <p:txBody>
-          <a:bodyPr wrap="square" lIns="0" tIns="0" rIns="0" bIns="0" rtlCol="0" anchor="ctr"/>
-          <a:lstStyle/>
-          <a:p>
-            <a:pPr indent="0" marL="0">
-              <a:buNone/>
-            </a:pPr>
-            <a:r>
-              <a:rPr lang="en-US" sz="3200" b="1" dirty="0">
+                <a:latin typeface="Calibri"/>
+              </a:rPr>
+              <a:t>I.   </a:t>
+            </a:r>
+            <a:r>
+              <a:rPr sz="1500" b="1" i="0">
                 <a:solidFill>
                   <a:srgbClr val="1E2761"/>
                 </a:solidFill>
-                <a:latin typeface="Cambria" pitchFamily="34" charset="0"/>
-                <a:ea typeface="Cambria" pitchFamily="34" charset="-122"/>
-                <a:cs typeface="Cambria" pitchFamily="34" charset="-120"/>
-              </a:rPr>
-              <a:t>Tabla de contenido</a:t>
-            </a:r>
-            <a:endParaRPr lang="en-US" sz="3200" dirty="0"/>
-          </a:p>
-        </p:txBody>
-      </p:sp>
-      <p:sp>
-        <p:nvSpPr>
-          <p:cNvPr id="4" name="Shape 2"/>
-          <p:cNvSpPr/>
-          <p:nvPr/>
-        </p:nvSpPr>
-        <p:spPr>
-          <a:xfrm>
-            <a:off x="640080" y="1783080"/>
-            <a:ext cx="10908792" cy="987552"/>
-          </a:xfrm>
-          <a:prstGeom prst="roundRect">
-            <a:avLst>
-              <a:gd name="adj" fmla="val 8333"/>
-            </a:avLst>
-          </a:prstGeom>
-          <a:solidFill>
-            <a:srgbClr val="EEF3FC"/>
-          </a:solidFill>
-          <a:ln/>
-        </p:spPr>
-        <p:txBody>
-          <a:bodyPr/>
-          <a:p/>
-        </p:txBody>
-      </p:sp>
-      <p:sp>
-        <p:nvSpPr>
-          <p:cNvPr id="5" name="Text 3"/>
-          <p:cNvSpPr/>
-          <p:nvPr/>
-        </p:nvSpPr>
-        <p:spPr>
-          <a:xfrm>
-            <a:off x="777240" y="1783080"/>
-            <a:ext cx="777240" cy="987552"/>
-          </a:xfrm>
-          <a:prstGeom prst="rect">
-            <a:avLst/>
-          </a:prstGeom>
-          <a:noFill/>
-          <a:ln/>
-        </p:spPr>
-        <p:txBody>
-          <a:bodyPr wrap="square" lIns="0" tIns="0" rIns="0" bIns="0" rtlCol="0" anchor="ctr"/>
-          <a:lstStyle/>
-          <a:p>
-            <a:pPr algn="ctr" indent="0" marL="0">
-              <a:buNone/>
-            </a:pPr>
-            <a:r>
-              <a:rPr lang="en-US" sz="3000" b="1" dirty="0">
+                <a:latin typeface="Calibri"/>
+              </a:rPr>
+              <a:t>Clasificación de los activos financieros</a:t>
+            </a:r>
+          </a:p>
+        </p:txBody>
+      </p:sp>
+      <p:sp>
+        <p:nvSpPr>
+          <p:cNvPr id="38" name="TextBox 37"/>
+          <p:cNvSpPr txBox="1"/>
+          <p:nvPr/>
+        </p:nvSpPr>
+        <p:spPr>
+          <a:xfrm>
+            <a:off x="9189720" y="1783080"/>
+            <a:ext cx="1828800" cy="384048"/>
+          </a:xfrm>
+          <a:prstGeom prst="rect">
+            <a:avLst/>
+          </a:prstGeom>
+          <a:noFill/>
+        </p:spPr>
+        <p:txBody>
+          <a:bodyPr wrap="square">
+            <a:spAutoFit/>
+          </a:bodyPr>
+          <a:lstStyle/>
+          <a:p>
+            <a:pPr algn="r"/>
+            <a:r>
+              <a:rPr sz="1100" b="0" i="0">
+                <a:solidFill>
+                  <a:srgbClr val="A6ADC7"/>
+                </a:solidFill>
+                <a:latin typeface="Calibri"/>
+              </a:rPr>
+              <a:t>PÁG. 04</a:t>
+            </a:r>
+          </a:p>
+        </p:txBody>
+      </p:sp>
+      <p:sp>
+        <p:nvSpPr>
+          <p:cNvPr id="39" name="TextBox 38"/>
+          <p:cNvSpPr txBox="1"/>
+          <p:nvPr/>
+        </p:nvSpPr>
+        <p:spPr>
+          <a:xfrm>
+            <a:off x="777240" y="2350008"/>
+            <a:ext cx="8321040" cy="384048"/>
+          </a:xfrm>
+          <a:prstGeom prst="rect">
+            <a:avLst/>
+          </a:prstGeom>
+          <a:noFill/>
+        </p:spPr>
+        <p:txBody>
+          <a:bodyPr wrap="square">
+            <a:spAutoFit/>
+          </a:bodyPr>
+          <a:lstStyle/>
+          <a:p>
+            <a:r>
+              <a:rPr sz="1500" b="1" i="0">
                 <a:solidFill>
                   <a:srgbClr val="C9A227"/>
                 </a:solidFill>
-                <a:latin typeface="Cambria" pitchFamily="34" charset="0"/>
-                <a:ea typeface="Cambria" pitchFamily="34" charset="-122"/>
-                <a:cs typeface="Cambria" pitchFamily="34" charset="-120"/>
-              </a:rPr>
-              <a:t>I</a:t>
-            </a:r>
-            <a:endParaRPr lang="en-US" sz="3000" dirty="0"/>
-          </a:p>
-        </p:txBody>
-      </p:sp>
-      <p:sp>
-        <p:nvSpPr>
-          <p:cNvPr id="6" name="Shape 4"/>
-          <p:cNvSpPr/>
-          <p:nvPr/>
-        </p:nvSpPr>
-        <p:spPr>
-          <a:xfrm>
-            <a:off x="1691640" y="2020824"/>
-            <a:ext cx="512064" cy="512064"/>
-          </a:xfrm>
-          <a:prstGeom prst="ellipse">
-            <a:avLst/>
-          </a:prstGeom>
-          <a:solidFill>
-            <a:srgbClr val="1E2761"/>
-          </a:solidFill>
-          <a:ln/>
-        </p:spPr>
-        <p:txBody>
-          <a:bodyPr/>
-          <a:p/>
-        </p:txBody>
-      </p:sp>
-      <p:pic>
-        <p:nvPicPr>
-          <p:cNvPr id="7" name="Image 0" descr="/tmp/work/deck/icons/exchange_white.png">    </p:cNvPr>
-          <p:cNvPicPr>
-            <a:picLocks noChangeAspect="1"/>
-          </p:cNvPicPr>
-          <p:nvPr/>
-        </p:nvPicPr>
-        <p:blipFill>
-          <a:blip r:embed="rId1"/>
-          <a:stretch>
-            <a:fillRect/>
-          </a:stretch>
-        </p:blipFill>
-        <p:spPr>
-          <a:xfrm>
-            <a:off x="1814535" y="2143719"/>
-            <a:ext cx="266273" cy="266273"/>
-          </a:xfrm>
-          <a:prstGeom prst="rect">
-            <a:avLst/>
-          </a:prstGeom>
-        </p:spPr>
-      </p:pic>
-      <p:sp>
-        <p:nvSpPr>
-          <p:cNvPr id="8" name="Text 5"/>
-          <p:cNvSpPr/>
-          <p:nvPr/>
-        </p:nvSpPr>
-        <p:spPr>
-          <a:xfrm>
-            <a:off x="2423160" y="1901952"/>
-            <a:ext cx="6766560" cy="329184"/>
-          </a:xfrm>
-          <a:prstGeom prst="rect">
-            <a:avLst/>
-          </a:prstGeom>
-          <a:noFill/>
-          <a:ln/>
-        </p:spPr>
-        <p:txBody>
-          <a:bodyPr wrap="square" lIns="0" tIns="0" rIns="0" bIns="0" rtlCol="0" anchor="ctr"/>
-          <a:lstStyle/>
-          <a:p>
-            <a:pPr indent="0" marL="0">
-              <a:buNone/>
-            </a:pPr>
-            <a:r>
-              <a:rPr lang="en-US" sz="1450" b="1" dirty="0">
+                <a:latin typeface="Calibri"/>
+              </a:rPr>
+              <a:t>II.   </a:t>
+            </a:r>
+            <a:r>
+              <a:rPr sz="1500" b="1" i="0">
                 <a:solidFill>
                   <a:srgbClr val="1E2761"/>
                 </a:solidFill>
-                <a:latin typeface="Calibri" pitchFamily="34" charset="0"/>
-                <a:ea typeface="Calibri" pitchFamily="34" charset="-122"/>
-                <a:cs typeface="Calibri" pitchFamily="34" charset="-120"/>
-              </a:rPr>
-              <a:t>Intermediación financiera y mercados</a:t>
-            </a:r>
-            <a:endParaRPr lang="en-US" sz="1450" dirty="0"/>
-          </a:p>
-        </p:txBody>
-      </p:sp>
-      <p:sp>
-        <p:nvSpPr>
-          <p:cNvPr id="9" name="Text 6"/>
-          <p:cNvSpPr/>
-          <p:nvPr/>
-        </p:nvSpPr>
-        <p:spPr>
-          <a:xfrm>
-            <a:off x="2423160" y="2240280"/>
-            <a:ext cx="6766560" cy="457200"/>
-          </a:xfrm>
-          <a:prstGeom prst="rect">
-            <a:avLst/>
-          </a:prstGeom>
-          <a:noFill/>
-          <a:ln/>
-        </p:spPr>
-        <p:txBody>
-          <a:bodyPr wrap="square" lIns="0" tIns="0" rIns="0" bIns="0" rtlCol="0" anchor="ctr"/>
-          <a:lstStyle/>
-          <a:p>
-            <a:pPr indent="0" marL="0">
-              <a:lnSpc>
-                <a:spcPct val="110000"/>
-              </a:lnSpc>
-              <a:buNone/>
-            </a:pPr>
-            <a:r>
-              <a:rPr lang="en-US" sz="1050" dirty="0">
-                <a:solidFill>
-                  <a:srgbClr val="5B6482"/>
-                </a:solidFill>
-                <a:latin typeface="Calibri" pitchFamily="34" charset="0"/>
-                <a:ea typeface="Calibri" pitchFamily="34" charset="-122"/>
-                <a:cs typeface="Calibri" pitchFamily="34" charset="-120"/>
-              </a:rPr>
-              <a:t>Activos financieros, agentes, mercado de dinero y de capitales, y canales de crédito</a:t>
-            </a:r>
-            <a:endParaRPr lang="en-US" sz="1050" dirty="0"/>
-          </a:p>
-        </p:txBody>
-      </p:sp>
-      <p:sp>
-        <p:nvSpPr>
-          <p:cNvPr id="10" name="Shape 7"/>
-          <p:cNvSpPr/>
-          <p:nvPr/>
-        </p:nvSpPr>
-        <p:spPr>
-          <a:xfrm>
-            <a:off x="9948672" y="2084832"/>
-            <a:ext cx="1417320" cy="384048"/>
-          </a:xfrm>
-          <a:prstGeom prst="roundRect">
-            <a:avLst>
-              <a:gd name="adj" fmla="val 50000"/>
-            </a:avLst>
-          </a:prstGeom>
-          <a:solidFill>
-            <a:srgbClr val="1E2761"/>
-          </a:solidFill>
-          <a:ln/>
-        </p:spPr>
-        <p:txBody>
-          <a:bodyPr/>
-          <a:p/>
-        </p:txBody>
-      </p:sp>
-      <p:sp>
-        <p:nvSpPr>
-          <p:cNvPr id="11" name="Text 8"/>
-          <p:cNvSpPr/>
-          <p:nvPr/>
-        </p:nvSpPr>
-        <p:spPr>
-          <a:xfrm>
-            <a:off x="9948672" y="2084832"/>
-            <a:ext cx="1417320" cy="384048"/>
-          </a:xfrm>
-          <a:prstGeom prst="rect">
-            <a:avLst/>
-          </a:prstGeom>
-          <a:noFill/>
-          <a:ln/>
-        </p:spPr>
-        <p:txBody>
-          <a:bodyPr wrap="square" lIns="0" tIns="0" rIns="0" bIns="0" rtlCol="0" anchor="ctr"/>
-          <a:lstStyle/>
-          <a:p>
-            <a:pPr algn="ctr" indent="0" marL="0">
-              <a:buNone/>
-            </a:pPr>
-            <a:r>
-              <a:rPr lang="en-US" sz="950" b="1" spc="50" kern="0" dirty="0">
+                <a:latin typeface="Calibri"/>
+              </a:rPr>
+              <a:t>Mercado de dinero y mercado de capitales</a:t>
+            </a:r>
+          </a:p>
+        </p:txBody>
+      </p:sp>
+      <p:sp>
+        <p:nvSpPr>
+          <p:cNvPr id="40" name="TextBox 39"/>
+          <p:cNvSpPr txBox="1"/>
+          <p:nvPr/>
+        </p:nvSpPr>
+        <p:spPr>
+          <a:xfrm>
+            <a:off x="9189720" y="2350008"/>
+            <a:ext cx="1828800" cy="384048"/>
+          </a:xfrm>
+          <a:prstGeom prst="rect">
+            <a:avLst/>
+          </a:prstGeom>
+          <a:noFill/>
+        </p:spPr>
+        <p:txBody>
+          <a:bodyPr wrap="square">
+            <a:spAutoFit/>
+          </a:bodyPr>
+          <a:lstStyle/>
+          <a:p>
+            <a:pPr algn="r"/>
+            <a:r>
+              <a:rPr sz="1100" b="0" i="0">
+                <a:solidFill>
+                  <a:srgbClr val="A6ADC7"/>
+                </a:solidFill>
+                <a:latin typeface="Calibri"/>
+              </a:rPr>
+              <a:t>PÁG. 05</a:t>
+            </a:r>
+          </a:p>
+        </p:txBody>
+      </p:sp>
+      <p:sp>
+        <p:nvSpPr>
+          <p:cNvPr id="41" name="TextBox 40"/>
+          <p:cNvSpPr txBox="1"/>
+          <p:nvPr/>
+        </p:nvSpPr>
+        <p:spPr>
+          <a:xfrm>
+            <a:off x="777240" y="2916936"/>
+            <a:ext cx="8321040" cy="384048"/>
+          </a:xfrm>
+          <a:prstGeom prst="rect">
+            <a:avLst/>
+          </a:prstGeom>
+          <a:noFill/>
+        </p:spPr>
+        <p:txBody>
+          <a:bodyPr wrap="square">
+            <a:spAutoFit/>
+          </a:bodyPr>
+          <a:lstStyle/>
+          <a:p>
+            <a:r>
+              <a:rPr sz="1500" b="1" i="0">
                 <a:solidFill>
                   <a:srgbClr val="C9A227"/>
                 </a:solidFill>
-                <a:latin typeface="Calibri" pitchFamily="34" charset="0"/>
-                <a:ea typeface="Calibri" pitchFamily="34" charset="-122"/>
-                <a:cs typeface="Calibri" pitchFamily="34" charset="-120"/>
-              </a:rPr>
-              <a:t>PÁG. 5–11</a:t>
-            </a:r>
-            <a:endParaRPr lang="en-US" sz="950" dirty="0"/>
-          </a:p>
-        </p:txBody>
-      </p:sp>
-      <p:sp>
-        <p:nvSpPr>
-          <p:cNvPr id="12" name="Shape 9"/>
-          <p:cNvSpPr/>
-          <p:nvPr/>
-        </p:nvSpPr>
-        <p:spPr>
-          <a:xfrm>
-            <a:off x="640080" y="2953512"/>
-            <a:ext cx="10908792" cy="987552"/>
-          </a:xfrm>
-          <a:prstGeom prst="roundRect">
-            <a:avLst>
-              <a:gd name="adj" fmla="val 8333"/>
-            </a:avLst>
-          </a:prstGeom>
-          <a:solidFill>
-            <a:srgbClr val="FFFFFF"/>
-          </a:solidFill>
-          <a:ln w="12700">
-            <a:solidFill>
-              <a:srgbClr val="E1E7F5"/>
-            </a:solidFill>
-            <a:prstDash val="solid"/>
-          </a:ln>
-        </p:spPr>
-        <p:txBody>
-          <a:bodyPr/>
-          <a:p/>
-        </p:txBody>
-      </p:sp>
-      <p:sp>
-        <p:nvSpPr>
-          <p:cNvPr id="13" name="Text 10"/>
-          <p:cNvSpPr/>
-          <p:nvPr/>
-        </p:nvSpPr>
-        <p:spPr>
-          <a:xfrm>
-            <a:off x="777240" y="2953512"/>
-            <a:ext cx="777240" cy="987552"/>
-          </a:xfrm>
-          <a:prstGeom prst="rect">
-            <a:avLst/>
-          </a:prstGeom>
-          <a:noFill/>
-          <a:ln/>
-        </p:spPr>
-        <p:txBody>
-          <a:bodyPr wrap="square" lIns="0" tIns="0" rIns="0" bIns="0" rtlCol="0" anchor="ctr"/>
-          <a:lstStyle/>
-          <a:p>
-            <a:pPr algn="ctr" indent="0" marL="0">
-              <a:buNone/>
-            </a:pPr>
-            <a:r>
-              <a:rPr lang="en-US" sz="3000" b="1" dirty="0">
+                <a:latin typeface="Calibri"/>
+              </a:rPr>
+              <a:t>III.   </a:t>
+            </a:r>
+            <a:r>
+              <a:rPr sz="1500" b="1" i="0">
+                <a:solidFill>
+                  <a:srgbClr val="1E2761"/>
+                </a:solidFill>
+                <a:latin typeface="Calibri"/>
+              </a:rPr>
+              <a:t>Agentes económicos y su acceso a los mercados</a:t>
+            </a:r>
+          </a:p>
+        </p:txBody>
+      </p:sp>
+      <p:sp>
+        <p:nvSpPr>
+          <p:cNvPr id="42" name="TextBox 41"/>
+          <p:cNvSpPr txBox="1"/>
+          <p:nvPr/>
+        </p:nvSpPr>
+        <p:spPr>
+          <a:xfrm>
+            <a:off x="9189720" y="2916936"/>
+            <a:ext cx="1828800" cy="384048"/>
+          </a:xfrm>
+          <a:prstGeom prst="rect">
+            <a:avLst/>
+          </a:prstGeom>
+          <a:noFill/>
+        </p:spPr>
+        <p:txBody>
+          <a:bodyPr wrap="square">
+            <a:spAutoFit/>
+          </a:bodyPr>
+          <a:lstStyle/>
+          <a:p>
+            <a:pPr algn="r"/>
+            <a:r>
+              <a:rPr sz="1100" b="0" i="0">
+                <a:solidFill>
+                  <a:srgbClr val="A6ADC7"/>
+                </a:solidFill>
+                <a:latin typeface="Calibri"/>
+              </a:rPr>
+              <a:t>PÁG. 06</a:t>
+            </a:r>
+          </a:p>
+        </p:txBody>
+      </p:sp>
+      <p:sp>
+        <p:nvSpPr>
+          <p:cNvPr id="43" name="TextBox 42"/>
+          <p:cNvSpPr txBox="1"/>
+          <p:nvPr/>
+        </p:nvSpPr>
+        <p:spPr>
+          <a:xfrm>
+            <a:off x="777240" y="3483864"/>
+            <a:ext cx="8321040" cy="384048"/>
+          </a:xfrm>
+          <a:prstGeom prst="rect">
+            <a:avLst/>
+          </a:prstGeom>
+          <a:noFill/>
+        </p:spPr>
+        <p:txBody>
+          <a:bodyPr wrap="square">
+            <a:spAutoFit/>
+          </a:bodyPr>
+          <a:lstStyle/>
+          <a:p>
+            <a:r>
+              <a:rPr sz="1500" b="1" i="0">
                 <a:solidFill>
                   <a:srgbClr val="C9A227"/>
                 </a:solidFill>
-                <a:latin typeface="Cambria" pitchFamily="34" charset="0"/>
-                <a:ea typeface="Cambria" pitchFamily="34" charset="-122"/>
-                <a:cs typeface="Cambria" pitchFamily="34" charset="-120"/>
-              </a:rPr>
-              <a:t>II</a:t>
-            </a:r>
-            <a:endParaRPr lang="en-US" sz="3000" dirty="0"/>
-          </a:p>
-        </p:txBody>
-      </p:sp>
-      <p:sp>
-        <p:nvSpPr>
-          <p:cNvPr id="14" name="Shape 11"/>
-          <p:cNvSpPr/>
-          <p:nvPr/>
-        </p:nvSpPr>
-        <p:spPr>
-          <a:xfrm>
-            <a:off x="1691640" y="3191256"/>
-            <a:ext cx="512064" cy="512064"/>
-          </a:xfrm>
-          <a:prstGeom prst="ellipse">
-            <a:avLst/>
-          </a:prstGeom>
-          <a:solidFill>
-            <a:srgbClr val="1E2761"/>
-          </a:solidFill>
-          <a:ln/>
-        </p:spPr>
-        <p:txBody>
-          <a:bodyPr/>
-          <a:p/>
-        </p:txBody>
-      </p:sp>
-      <p:pic>
-        <p:nvPicPr>
-          <p:cNvPr id="15" name="Image 1" descr="/tmp/work/deck/icons/sitemap_white.png">    </p:cNvPr>
-          <p:cNvPicPr>
-            <a:picLocks noChangeAspect="1"/>
-          </p:cNvPicPr>
-          <p:nvPr/>
-        </p:nvPicPr>
-        <p:blipFill>
-          <a:blip r:embed="rId2"/>
-          <a:stretch>
-            <a:fillRect/>
-          </a:stretch>
-        </p:blipFill>
-        <p:spPr>
-          <a:xfrm>
-            <a:off x="1814535" y="3314151"/>
-            <a:ext cx="266273" cy="266273"/>
-          </a:xfrm>
-          <a:prstGeom prst="rect">
-            <a:avLst/>
-          </a:prstGeom>
-        </p:spPr>
-      </p:pic>
-      <p:sp>
-        <p:nvSpPr>
-          <p:cNvPr id="16" name="Text 12"/>
-          <p:cNvSpPr/>
-          <p:nvPr/>
-        </p:nvSpPr>
-        <p:spPr>
-          <a:xfrm>
-            <a:off x="2423160" y="3072384"/>
-            <a:ext cx="6766560" cy="329184"/>
-          </a:xfrm>
-          <a:prstGeom prst="rect">
-            <a:avLst/>
-          </a:prstGeom>
-          <a:noFill/>
-          <a:ln/>
-        </p:spPr>
-        <p:txBody>
-          <a:bodyPr wrap="square" lIns="0" tIns="0" rIns="0" bIns="0" rtlCol="0" anchor="ctr"/>
-          <a:lstStyle/>
-          <a:p>
-            <a:pPr indent="0" marL="0">
-              <a:buNone/>
-            </a:pPr>
-            <a:r>
-              <a:rPr lang="en-US" sz="1450" b="1" dirty="0">
+                <a:latin typeface="Calibri"/>
+              </a:rPr>
+              <a:t>IV.   </a:t>
+            </a:r>
+            <a:r>
+              <a:rPr sz="1500" b="1" i="0">
                 <a:solidFill>
                   <a:srgbClr val="1E2761"/>
                 </a:solidFill>
-                <a:latin typeface="Calibri" pitchFamily="34" charset="0"/>
-                <a:ea typeface="Calibri" pitchFamily="34" charset="-122"/>
-                <a:cs typeface="Calibri" pitchFamily="34" charset="-120"/>
-              </a:rPr>
-              <a:t>Estructura del Sistema Financiero Mexicano</a:t>
-            </a:r>
-            <a:endParaRPr lang="en-US" sz="1450" dirty="0"/>
-          </a:p>
-        </p:txBody>
-      </p:sp>
-      <p:sp>
-        <p:nvSpPr>
-          <p:cNvPr id="17" name="Text 13"/>
-          <p:cNvSpPr/>
-          <p:nvPr/>
-        </p:nvSpPr>
-        <p:spPr>
-          <a:xfrm>
-            <a:off x="2423160" y="3410712"/>
-            <a:ext cx="6766560" cy="457200"/>
-          </a:xfrm>
-          <a:prstGeom prst="rect">
-            <a:avLst/>
-          </a:prstGeom>
-          <a:noFill/>
-          <a:ln/>
-        </p:spPr>
-        <p:txBody>
-          <a:bodyPr wrap="square" lIns="0" tIns="0" rIns="0" bIns="0" rtlCol="0" anchor="ctr"/>
-          <a:lstStyle/>
-          <a:p>
-            <a:pPr indent="0" marL="0">
-              <a:lnSpc>
-                <a:spcPct val="110000"/>
-              </a:lnSpc>
-              <a:buNone/>
-            </a:pPr>
-            <a:r>
-              <a:rPr lang="en-US" sz="1050" dirty="0">
-                <a:solidFill>
-                  <a:srgbClr val="5B6482"/>
-                </a:solidFill>
-                <a:latin typeface="Calibri" pitchFamily="34" charset="0"/>
-                <a:ea typeface="Calibri" pitchFamily="34" charset="-122"/>
-                <a:cs typeface="Calibri" pitchFamily="34" charset="-120"/>
-              </a:rPr>
-              <a:t>Reguladores, supervisores y organismos de apoyo y protección</a:t>
-            </a:r>
-            <a:endParaRPr lang="en-US" sz="1050" dirty="0"/>
-          </a:p>
-        </p:txBody>
-      </p:sp>
-      <p:sp>
-        <p:nvSpPr>
-          <p:cNvPr id="18" name="Shape 14"/>
-          <p:cNvSpPr/>
-          <p:nvPr/>
-        </p:nvSpPr>
-        <p:spPr>
-          <a:xfrm>
-            <a:off x="9948672" y="3255264"/>
-            <a:ext cx="1417320" cy="384048"/>
-          </a:xfrm>
-          <a:prstGeom prst="roundRect">
-            <a:avLst>
-              <a:gd name="adj" fmla="val 50000"/>
-            </a:avLst>
-          </a:prstGeom>
-          <a:solidFill>
-            <a:srgbClr val="1E2761"/>
-          </a:solidFill>
-          <a:ln/>
-        </p:spPr>
-        <p:txBody>
-          <a:bodyPr/>
-          <a:p/>
-        </p:txBody>
-      </p:sp>
-      <p:sp>
-        <p:nvSpPr>
-          <p:cNvPr id="19" name="Text 15"/>
-          <p:cNvSpPr/>
-          <p:nvPr/>
-        </p:nvSpPr>
-        <p:spPr>
-          <a:xfrm>
-            <a:off x="9948672" y="3255264"/>
-            <a:ext cx="1417320" cy="384048"/>
-          </a:xfrm>
-          <a:prstGeom prst="rect">
-            <a:avLst/>
-          </a:prstGeom>
-          <a:noFill/>
-          <a:ln/>
-        </p:spPr>
-        <p:txBody>
-          <a:bodyPr wrap="square" lIns="0" tIns="0" rIns="0" bIns="0" rtlCol="0" anchor="ctr"/>
-          <a:lstStyle/>
-          <a:p>
-            <a:pPr algn="ctr" indent="0" marL="0">
-              <a:buNone/>
-            </a:pPr>
-            <a:r>
-              <a:rPr lang="en-US" sz="950" b="1" spc="50" kern="0" dirty="0">
-                <a:solidFill>
-                  <a:srgbClr val="C9A227"/>
-                </a:solidFill>
-                <a:latin typeface="Calibri" pitchFamily="34" charset="0"/>
-                <a:ea typeface="Calibri" pitchFamily="34" charset="-122"/>
-                <a:cs typeface="Calibri" pitchFamily="34" charset="-120"/>
-              </a:rPr>
-              <a:t>PÁG. 12–13</a:t>
-            </a:r>
-            <a:endParaRPr lang="en-US" sz="950" dirty="0"/>
-          </a:p>
-        </p:txBody>
-      </p:sp>
-      <p:sp>
-        <p:nvSpPr>
-          <p:cNvPr id="20" name="Shape 16"/>
-          <p:cNvSpPr/>
-          <p:nvPr/>
-        </p:nvSpPr>
-        <p:spPr>
-          <a:xfrm>
-            <a:off x="640080" y="4123944"/>
-            <a:ext cx="10908792" cy="987552"/>
-          </a:xfrm>
-          <a:prstGeom prst="roundRect">
-            <a:avLst>
-              <a:gd name="adj" fmla="val 8333"/>
-            </a:avLst>
-          </a:prstGeom>
-          <a:solidFill>
-            <a:srgbClr val="EEF3FC"/>
-          </a:solidFill>
-          <a:ln/>
-        </p:spPr>
-        <p:txBody>
-          <a:bodyPr/>
-          <a:p/>
-        </p:txBody>
-      </p:sp>
-      <p:sp>
-        <p:nvSpPr>
-          <p:cNvPr id="21" name="Text 17"/>
-          <p:cNvSpPr/>
-          <p:nvPr/>
-        </p:nvSpPr>
-        <p:spPr>
-          <a:xfrm>
-            <a:off x="777240" y="4123944"/>
-            <a:ext cx="777240" cy="987552"/>
-          </a:xfrm>
-          <a:prstGeom prst="rect">
-            <a:avLst/>
-          </a:prstGeom>
-          <a:noFill/>
-          <a:ln/>
-        </p:spPr>
-        <p:txBody>
-          <a:bodyPr wrap="square" lIns="0" tIns="0" rIns="0" bIns="0" rtlCol="0" anchor="ctr"/>
-          <a:lstStyle/>
-          <a:p>
-            <a:pPr algn="ctr" indent="0" marL="0">
-              <a:buNone/>
-            </a:pPr>
-            <a:r>
-              <a:rPr lang="en-US" sz="3000" b="1" dirty="0">
-                <a:solidFill>
-                  <a:srgbClr val="C9A227"/>
-                </a:solidFill>
-                <a:latin typeface="Cambria" pitchFamily="34" charset="0"/>
-                <a:ea typeface="Cambria" pitchFamily="34" charset="-122"/>
-                <a:cs typeface="Cambria" pitchFamily="34" charset="-120"/>
-              </a:rPr>
-              <a:t>III</a:t>
-            </a:r>
-            <a:endParaRPr lang="en-US" sz="3000" dirty="0"/>
-          </a:p>
-        </p:txBody>
-      </p:sp>
-      <p:sp>
-        <p:nvSpPr>
-          <p:cNvPr id="22" name="Shape 18"/>
-          <p:cNvSpPr/>
-          <p:nvPr/>
-        </p:nvSpPr>
-        <p:spPr>
-          <a:xfrm>
-            <a:off x="1691640" y="4361688"/>
-            <a:ext cx="512064" cy="512064"/>
-          </a:xfrm>
-          <a:prstGeom prst="ellipse">
-            <a:avLst/>
-          </a:prstGeom>
-          <a:solidFill>
-            <a:srgbClr val="1E2761"/>
-          </a:solidFill>
-          <a:ln/>
-        </p:spPr>
-        <p:txBody>
-          <a:bodyPr/>
-          <a:p/>
-        </p:txBody>
-      </p:sp>
-      <p:pic>
-        <p:nvPicPr>
-          <p:cNvPr id="23" name="Image 2" descr="/tmp/work/deck/icons/users_white.png">    </p:cNvPr>
-          <p:cNvPicPr>
-            <a:picLocks noChangeAspect="1"/>
-          </p:cNvPicPr>
-          <p:nvPr/>
-        </p:nvPicPr>
-        <p:blipFill>
-          <a:blip r:embed="rId3"/>
-          <a:stretch>
-            <a:fillRect/>
-          </a:stretch>
-        </p:blipFill>
-        <p:spPr>
-          <a:xfrm>
-            <a:off x="1814535" y="4484583"/>
-            <a:ext cx="266273" cy="266273"/>
-          </a:xfrm>
-          <a:prstGeom prst="rect">
-            <a:avLst/>
-          </a:prstGeom>
-        </p:spPr>
-      </p:pic>
-      <p:sp>
-        <p:nvSpPr>
-          <p:cNvPr id="24" name="Text 19"/>
-          <p:cNvSpPr/>
-          <p:nvPr/>
-        </p:nvSpPr>
-        <p:spPr>
-          <a:xfrm>
-            <a:off x="2423160" y="4242816"/>
-            <a:ext cx="6766560" cy="329184"/>
-          </a:xfrm>
-          <a:prstGeom prst="rect">
-            <a:avLst/>
-          </a:prstGeom>
-          <a:noFill/>
-          <a:ln/>
-        </p:spPr>
-        <p:txBody>
-          <a:bodyPr wrap="square" lIns="0" tIns="0" rIns="0" bIns="0" rtlCol="0" anchor="ctr"/>
-          <a:lstStyle/>
-          <a:p>
-            <a:pPr indent="0" marL="0">
-              <a:buNone/>
-            </a:pPr>
-            <a:r>
-              <a:rPr lang="en-US" sz="1450" b="1" dirty="0">
-                <a:solidFill>
-                  <a:srgbClr val="1E2761"/>
-                </a:solidFill>
-                <a:latin typeface="Calibri" pitchFamily="34" charset="0"/>
-                <a:ea typeface="Calibri" pitchFamily="34" charset="-122"/>
-                <a:cs typeface="Calibri" pitchFamily="34" charset="-120"/>
-              </a:rPr>
-              <a:t>Taller práctico</a:t>
-            </a:r>
-            <a:endParaRPr lang="en-US" sz="1450" dirty="0"/>
-          </a:p>
-        </p:txBody>
-      </p:sp>
-      <p:sp>
-        <p:nvSpPr>
-          <p:cNvPr id="25" name="Text 20"/>
-          <p:cNvSpPr/>
-          <p:nvPr/>
-        </p:nvSpPr>
-        <p:spPr>
-          <a:xfrm>
-            <a:off x="2423160" y="4581144"/>
-            <a:ext cx="6766560" cy="457200"/>
-          </a:xfrm>
-          <a:prstGeom prst="rect">
-            <a:avLst/>
-          </a:prstGeom>
-          <a:noFill/>
-          <a:ln/>
-        </p:spPr>
-        <p:txBody>
-          <a:bodyPr wrap="square" lIns="0" tIns="0" rIns="0" bIns="0" rtlCol="0" anchor="ctr"/>
-          <a:lstStyle/>
-          <a:p>
-            <a:pPr indent="0" marL="0">
-              <a:lnSpc>
-                <a:spcPct val="110000"/>
-              </a:lnSpc>
-              <a:buNone/>
-            </a:pPr>
-            <a:r>
-              <a:rPr lang="en-US" sz="1050" dirty="0">
-                <a:solidFill>
-                  <a:srgbClr val="5B6482"/>
-                </a:solidFill>
-                <a:latin typeface="Calibri" pitchFamily="34" charset="0"/>
-                <a:ea typeface="Calibri" pitchFamily="34" charset="-122"/>
-                <a:cs typeface="Calibri" pitchFamily="34" charset="-120"/>
-              </a:rPr>
-              <a:t>Mapeo institucional y análisis de casos reales aplicando los conceptos vistos</a:t>
-            </a:r>
-            <a:endParaRPr lang="en-US" sz="1050" dirty="0"/>
-          </a:p>
-        </p:txBody>
-      </p:sp>
-      <p:sp>
-        <p:nvSpPr>
-          <p:cNvPr id="26" name="Shape 21"/>
-          <p:cNvSpPr/>
-          <p:nvPr/>
-        </p:nvSpPr>
-        <p:spPr>
-          <a:xfrm>
-            <a:off x="9948672" y="4425696"/>
-            <a:ext cx="1417320" cy="384048"/>
-          </a:xfrm>
-          <a:prstGeom prst="roundRect">
-            <a:avLst>
-              <a:gd name="adj" fmla="val 50000"/>
-            </a:avLst>
-          </a:prstGeom>
-          <a:solidFill>
-            <a:srgbClr val="1E2761"/>
-          </a:solidFill>
-          <a:ln/>
-        </p:spPr>
-        <p:txBody>
-          <a:bodyPr/>
-          <a:p/>
-        </p:txBody>
-      </p:sp>
-      <p:sp>
-        <p:nvSpPr>
-          <p:cNvPr id="27" name="Text 22"/>
-          <p:cNvSpPr/>
-          <p:nvPr/>
-        </p:nvSpPr>
-        <p:spPr>
-          <a:xfrm>
-            <a:off x="9948672" y="4425696"/>
-            <a:ext cx="1417320" cy="384048"/>
-          </a:xfrm>
-          <a:prstGeom prst="rect">
-            <a:avLst/>
-          </a:prstGeom>
-          <a:noFill/>
-          <a:ln/>
-        </p:spPr>
-        <p:txBody>
-          <a:bodyPr wrap="square" lIns="0" tIns="0" rIns="0" bIns="0" rtlCol="0" anchor="ctr"/>
-          <a:lstStyle/>
-          <a:p>
-            <a:pPr algn="ctr" indent="0" marL="0">
-              <a:buNone/>
-            </a:pPr>
-            <a:r>
-              <a:rPr lang="en-US" sz="950" b="1" spc="50" kern="0" dirty="0">
-                <a:solidFill>
-                  <a:srgbClr val="C9A227"/>
-                </a:solidFill>
-                <a:latin typeface="Calibri" pitchFamily="34" charset="0"/>
-                <a:ea typeface="Calibri" pitchFamily="34" charset="-122"/>
-                <a:cs typeface="Calibri" pitchFamily="34" charset="-120"/>
-              </a:rPr>
-              <a:t>PÁG. 15–16</a:t>
-            </a:r>
-            <a:endParaRPr lang="en-US" sz="950" dirty="0"/>
-          </a:p>
-        </p:txBody>
-      </p:sp>
-      <p:sp>
-        <p:nvSpPr>
-          <p:cNvPr id="28" name="Shape 23"/>
-          <p:cNvSpPr/>
-          <p:nvPr/>
-        </p:nvSpPr>
-        <p:spPr>
-          <a:xfrm>
-            <a:off x="640080" y="5294376"/>
-            <a:ext cx="10908792" cy="987552"/>
-          </a:xfrm>
-          <a:prstGeom prst="roundRect">
-            <a:avLst>
-              <a:gd name="adj" fmla="val 8333"/>
-            </a:avLst>
-          </a:prstGeom>
-          <a:solidFill>
-            <a:srgbClr val="FFFFFF"/>
-          </a:solidFill>
-          <a:ln w="12700">
-            <a:solidFill>
-              <a:srgbClr val="E1E7F5"/>
-            </a:solidFill>
-            <a:prstDash val="solid"/>
-          </a:ln>
-        </p:spPr>
-        <p:txBody>
-          <a:bodyPr/>
-          <a:p/>
-        </p:txBody>
-      </p:sp>
-      <p:sp>
-        <p:nvSpPr>
-          <p:cNvPr id="29" name="Text 24"/>
-          <p:cNvSpPr/>
-          <p:nvPr/>
-        </p:nvSpPr>
-        <p:spPr>
-          <a:xfrm>
-            <a:off x="777240" y="5294376"/>
-            <a:ext cx="777240" cy="987552"/>
-          </a:xfrm>
-          <a:prstGeom prst="rect">
-            <a:avLst/>
-          </a:prstGeom>
-          <a:noFill/>
-          <a:ln/>
-        </p:spPr>
-        <p:txBody>
-          <a:bodyPr wrap="square" lIns="0" tIns="0" rIns="0" bIns="0" rtlCol="0" anchor="ctr"/>
-          <a:lstStyle/>
-          <a:p>
-            <a:pPr algn="ctr" indent="0" marL="0">
-              <a:buNone/>
-            </a:pPr>
-            <a:r>
-              <a:rPr lang="en-US" sz="3000" b="1" dirty="0">
-                <a:solidFill>
-                  <a:srgbClr val="C9A227"/>
-                </a:solidFill>
-                <a:latin typeface="Cambria" pitchFamily="34" charset="0"/>
-                <a:ea typeface="Cambria" pitchFamily="34" charset="-122"/>
-                <a:cs typeface="Cambria" pitchFamily="34" charset="-120"/>
-              </a:rPr>
-              <a:t>IV</a:t>
-            </a:r>
-            <a:endParaRPr lang="en-US" sz="3000" dirty="0"/>
-          </a:p>
-        </p:txBody>
-      </p:sp>
-      <p:sp>
-        <p:nvSpPr>
-          <p:cNvPr id="30" name="Shape 25"/>
-          <p:cNvSpPr/>
-          <p:nvPr/>
-        </p:nvSpPr>
-        <p:spPr>
-          <a:xfrm>
-            <a:off x="1691640" y="5532120"/>
-            <a:ext cx="512064" cy="512064"/>
-          </a:xfrm>
-          <a:prstGeom prst="ellipse">
-            <a:avLst/>
-          </a:prstGeom>
-          <a:solidFill>
-            <a:srgbClr val="1E2761"/>
-          </a:solidFill>
-          <a:ln/>
-        </p:spPr>
-        <p:txBody>
-          <a:bodyPr/>
-          <a:p/>
-        </p:txBody>
-      </p:sp>
-      <p:pic>
-        <p:nvPicPr>
-          <p:cNvPr id="31" name="Image 3" descr="/tmp/work/deck/icons/bookopen_white.png">    </p:cNvPr>
-          <p:cNvPicPr>
-            <a:picLocks noChangeAspect="1"/>
-          </p:cNvPicPr>
-          <p:nvPr/>
-        </p:nvPicPr>
-        <p:blipFill>
-          <a:blip r:embed="rId4"/>
-          <a:stretch>
-            <a:fillRect/>
-          </a:stretch>
-        </p:blipFill>
-        <p:spPr>
-          <a:xfrm>
-            <a:off x="1814535" y="5655015"/>
-            <a:ext cx="266273" cy="266273"/>
-          </a:xfrm>
-          <a:prstGeom prst="rect">
-            <a:avLst/>
-          </a:prstGeom>
-        </p:spPr>
-      </p:pic>
-      <p:sp>
-        <p:nvSpPr>
-          <p:cNvPr id="32" name="Text 26"/>
-          <p:cNvSpPr/>
-          <p:nvPr/>
-        </p:nvSpPr>
-        <p:spPr>
-          <a:xfrm>
-            <a:off x="2423160" y="5413248"/>
-            <a:ext cx="6766560" cy="329184"/>
-          </a:xfrm>
-          <a:prstGeom prst="rect">
-            <a:avLst/>
-          </a:prstGeom>
-          <a:noFill/>
-          <a:ln/>
-        </p:spPr>
-        <p:txBody>
-          <a:bodyPr wrap="square" lIns="0" tIns="0" rIns="0" bIns="0" rtlCol="0" anchor="ctr"/>
-          <a:lstStyle/>
-          <a:p>
-            <a:pPr indent="0" marL="0">
-              <a:buNone/>
-            </a:pPr>
-            <a:r>
-              <a:rPr lang="en-US" sz="1450" b="1" dirty="0">
-                <a:solidFill>
-                  <a:srgbClr val="1E2761"/>
-                </a:solidFill>
-                <a:latin typeface="Calibri" pitchFamily="34" charset="0"/>
-                <a:ea typeface="Calibri" pitchFamily="34" charset="-122"/>
-                <a:cs typeface="Calibri" pitchFamily="34" charset="-120"/>
+                <a:latin typeface="Calibri"/>
               </a:rPr>
               <a:t>Fuentes y referencias</a:t>
             </a:r>
-            <a:endParaRPr lang="en-US" sz="1450" dirty="0"/>
-          </a:p>
-        </p:txBody>
-      </p:sp>
-      <p:sp>
-        <p:nvSpPr>
-          <p:cNvPr id="33" name="Text 27"/>
-          <p:cNvSpPr/>
-          <p:nvPr/>
-        </p:nvSpPr>
-        <p:spPr>
-          <a:xfrm>
-            <a:off x="2423160" y="5751576"/>
-            <a:ext cx="6766560" cy="457200"/>
-          </a:xfrm>
-          <a:prstGeom prst="rect">
-            <a:avLst/>
-          </a:prstGeom>
-          <a:noFill/>
-          <a:ln/>
-        </p:spPr>
-        <p:txBody>
-          <a:bodyPr wrap="square" lIns="0" tIns="0" rIns="0" bIns="0" rtlCol="0" anchor="ctr"/>
-          <a:lstStyle/>
-          <a:p>
-            <a:pPr indent="0" marL="0">
-              <a:lnSpc>
-                <a:spcPct val="110000"/>
-              </a:lnSpc>
-              <a:buNone/>
-            </a:pPr>
-            <a:r>
-              <a:rPr lang="en-US" sz="1050" dirty="0">
-                <a:solidFill>
-                  <a:srgbClr val="5B6482"/>
-                </a:solidFill>
-                <a:latin typeface="Calibri" pitchFamily="34" charset="0"/>
-                <a:ea typeface="Calibri" pitchFamily="34" charset="-122"/>
-                <a:cs typeface="Calibri" pitchFamily="34" charset="-120"/>
-              </a:rPr>
-              <a:t>Bibliografía del curso y portales oficiales de consulta</a:t>
-            </a:r>
-            <a:endParaRPr lang="en-US" sz="1050" dirty="0"/>
-          </a:p>
-        </p:txBody>
-      </p:sp>
-      <p:sp>
-        <p:nvSpPr>
-          <p:cNvPr id="34" name="Shape 28"/>
-          <p:cNvSpPr/>
-          <p:nvPr/>
-        </p:nvSpPr>
-        <p:spPr>
-          <a:xfrm>
-            <a:off x="9948672" y="5596128"/>
-            <a:ext cx="1417320" cy="384048"/>
-          </a:xfrm>
-          <a:prstGeom prst="roundRect">
-            <a:avLst>
-              <a:gd name="adj" fmla="val 50000"/>
-            </a:avLst>
-          </a:prstGeom>
-          <a:solidFill>
-            <a:srgbClr val="1E2761"/>
-          </a:solidFill>
-          <a:ln/>
-        </p:spPr>
-        <p:txBody>
-          <a:bodyPr/>
-          <a:p/>
-        </p:txBody>
-      </p:sp>
-      <p:sp>
-        <p:nvSpPr>
-          <p:cNvPr id="35" name="Text 29"/>
-          <p:cNvSpPr/>
-          <p:nvPr/>
-        </p:nvSpPr>
-        <p:spPr>
-          <a:xfrm>
-            <a:off x="9948672" y="5596128"/>
-            <a:ext cx="1417320" cy="384048"/>
-          </a:xfrm>
-          <a:prstGeom prst="rect">
-            <a:avLst/>
-          </a:prstGeom>
-          <a:noFill/>
-          <a:ln/>
-        </p:spPr>
-        <p:txBody>
-          <a:bodyPr wrap="square" lIns="0" tIns="0" rIns="0" bIns="0" rtlCol="0" anchor="ctr"/>
-          <a:lstStyle/>
-          <a:p>
-            <a:pPr algn="ctr" indent="0" marL="0">
-              <a:buNone/>
-            </a:pPr>
-            <a:r>
-              <a:rPr lang="en-US" sz="950" b="1" spc="50" kern="0" dirty="0">
-                <a:solidFill>
-                  <a:srgbClr val="C9A227"/>
-                </a:solidFill>
-                <a:latin typeface="Calibri" pitchFamily="34" charset="0"/>
-                <a:ea typeface="Calibri" pitchFamily="34" charset="-122"/>
-                <a:cs typeface="Calibri" pitchFamily="34" charset="-120"/>
-              </a:rPr>
-              <a:t>PÁG. 17</a:t>
-            </a:r>
-            <a:endParaRPr lang="en-US" sz="950" dirty="0"/>
-          </a:p>
-        </p:txBody>
-      </p:sp>
-      <p:sp>
-        <p:nvSpPr>
-          <p:cNvPr id="36" name="Text 30"/>
-          <p:cNvSpPr/>
-          <p:nvPr/>
-        </p:nvSpPr>
-        <p:spPr>
-          <a:xfrm>
-            <a:off x="11365992" y="6446520"/>
-            <a:ext cx="548640" cy="274320"/>
-          </a:xfrm>
-          <a:prstGeom prst="rect">
-            <a:avLst/>
-          </a:prstGeom>
-          <a:noFill/>
-          <a:ln/>
-        </p:spPr>
-        <p:txBody>
-          <a:bodyPr wrap="square" rtlCol="0" anchor="ctr"/>
-          <a:lstStyle/>
-          <a:p>
-            <a:pPr algn="r" indent="0" marL="0">
-              <a:buNone/>
-            </a:pPr>
-            <a:r>
-              <a:rPr lang="en-US" sz="1000" dirty="0">
+          </a:p>
+        </p:txBody>
+      </p:sp>
+      <p:sp>
+        <p:nvSpPr>
+          <p:cNvPr id="44" name="TextBox 43"/>
+          <p:cNvSpPr txBox="1"/>
+          <p:nvPr/>
+        </p:nvSpPr>
+        <p:spPr>
+          <a:xfrm>
+            <a:off x="9189720" y="3483864"/>
+            <a:ext cx="1828800" cy="384048"/>
+          </a:xfrm>
+          <a:prstGeom prst="rect">
+            <a:avLst/>
+          </a:prstGeom>
+          <a:noFill/>
+        </p:spPr>
+        <p:txBody>
+          <a:bodyPr wrap="square">
+            <a:spAutoFit/>
+          </a:bodyPr>
+          <a:lstStyle/>
+          <a:p>
+            <a:pPr algn="r"/>
+            <a:r>
+              <a:rPr sz="1100" b="0" i="0">
                 <a:solidFill>
                   <a:srgbClr val="A6ADC7"/>
                 </a:solidFill>
-                <a:latin typeface="Calibri" pitchFamily="34" charset="0"/>
-                <a:ea typeface="Calibri" pitchFamily="34" charset="-122"/>
-                <a:cs typeface="Calibri" pitchFamily="34" charset="-120"/>
-              </a:rPr>
-              <a:t>03</a:t>
-            </a:r>
-            <a:endParaRPr lang="en-US" sz="1000" dirty="0"/>
+                <a:latin typeface="Calibri"/>
+              </a:rPr>
+              <a:t>PÁG. 07</a:t>
+            </a:r>
           </a:p>
         </p:txBody>
       </p:sp>
@@ -11108,575 +8610,6 @@
                 <a:latin typeface="Calibri"/>
               </a:rPr>
               <a:t>Cap. 11, "The Money Markets".</a:t>
-            </a:r>
-          </a:p>
-        </p:txBody>
-      </p:sp>
-    </p:spTree>
-  </p:cSld>
-  <p:clrMapOvr>
-    <a:masterClrMapping/>
-  </p:clrMapOvr>
-</p:sld>
-</file>
-
-<file path=ppt/slides/slide7.xml><?xml version="1.0" encoding="utf-8"?>
-<p:sld xmlns:a="http://schemas.openxmlformats.org/drawingml/2006/main" xmlns:p="http://schemas.openxmlformats.org/presentationml/2006/main" xmlns:r="http://schemas.openxmlformats.org/officeDocument/2006/relationships">
-  <p:cSld>
-    <p:spTree>
-      <p:nvGrpSpPr>
-        <p:cNvPr id="1" name=""/>
-        <p:cNvGrpSpPr/>
-        <p:nvPr/>
-      </p:nvGrpSpPr>
-      <p:grpSpPr/>
-      <p:sp>
-        <p:nvSpPr>
-          <p:cNvPr id="2" name="Text 0"/>
-          <p:cNvSpPr/>
-          <p:nvPr/>
-        </p:nvSpPr>
-        <p:spPr>
-          <a:xfrm>
-            <a:off x="640080" y="457200"/>
-            <a:ext cx="9144000" cy="320040"/>
-          </a:xfrm>
-          <a:prstGeom prst="rect">
-            <a:avLst/>
-          </a:prstGeom>
-          <a:noFill/>
-          <a:ln/>
-        </p:spPr>
-        <p:txBody>
-          <a:bodyPr wrap="square" rtlCol="0" anchor="ctr"/>
-          <a:lstStyle/>
-          <a:p>
-            <a:pPr indent="0" marL="0">
-              <a:buNone/>
-            </a:pPr>
-            <a:r>
-              <a:rPr lang="en-US" sz="1200" b="1" spc="200" kern="0" dirty="0">
-                <a:solidFill>
-                  <a:srgbClr val="C9A227"/>
-                </a:solidFill>
-                <a:latin typeface="Calibri" pitchFamily="34" charset="0"/>
-                <a:ea typeface="Calibri" pitchFamily="34" charset="-122"/>
-                <a:cs typeface="Calibri" pitchFamily="34" charset="-120"/>
-              </a:rPr>
-              <a:t>PREPARACIÓN DOCENTE</a:t>
-            </a:r>
-            <a:endParaRPr lang="en-US" sz="1200" dirty="0"/>
-          </a:p>
-        </p:txBody>
-      </p:sp>
-      <p:sp>
-        <p:nvSpPr>
-          <p:cNvPr id="3" name="Shape 1"/>
-          <p:cNvSpPr/>
-          <p:nvPr/>
-        </p:nvSpPr>
-        <p:spPr>
-          <a:xfrm>
-            <a:off x="10771632" y="457200"/>
-            <a:ext cx="640080" cy="640080"/>
-          </a:xfrm>
-          <a:prstGeom prst="ellipse">
-            <a:avLst/>
-          </a:prstGeom>
-          <a:solidFill>
-            <a:srgbClr val="EEF3FC"/>
-          </a:solidFill>
-          <a:ln/>
-        </p:spPr>
-        <p:txBody>
-          <a:bodyPr/>
-          <a:p/>
-        </p:txBody>
-      </p:sp>
-      <p:pic>
-        <p:nvPicPr>
-          <p:cNvPr id="4" name="Image 0" descr="/tmp/work/deck/icons/bookopen_navy.png">    </p:cNvPr>
-          <p:cNvPicPr>
-            <a:picLocks noChangeAspect="1"/>
-          </p:cNvPicPr>
-          <p:nvPr/>
-        </p:nvPicPr>
-        <p:blipFill>
-          <a:blip r:embed="rId2"/>
-          <a:stretch>
-            <a:fillRect/>
-          </a:stretch>
-        </p:blipFill>
-        <p:spPr>
-          <a:xfrm>
-            <a:off x="10931652" y="617220"/>
-            <a:ext cx="320040" cy="320040"/>
-          </a:xfrm>
-          <a:prstGeom prst="rect">
-            <a:avLst/>
-          </a:prstGeom>
-        </p:spPr>
-      </p:pic>
-      <p:sp>
-        <p:nvSpPr>
-          <p:cNvPr id="5" name="Text 2"/>
-          <p:cNvSpPr/>
-          <p:nvPr/>
-        </p:nvSpPr>
-        <p:spPr>
-          <a:xfrm>
-            <a:off x="640080" y="749808"/>
-            <a:ext cx="9601200" cy="777240"/>
-          </a:xfrm>
-          <a:prstGeom prst="rect">
-            <a:avLst/>
-          </a:prstGeom>
-          <a:noFill/>
-          <a:ln/>
-        </p:spPr>
-        <p:txBody>
-          <a:bodyPr wrap="square" lIns="0" tIns="0" rIns="0" bIns="0" rtlCol="0" anchor="ctr"/>
-          <a:lstStyle/>
-          <a:p>
-            <a:pPr indent="0" marL="0">
-              <a:buNone/>
-            </a:pPr>
-            <a:r>
-              <a:rPr lang="en-US" sz="3200" b="1" dirty="0">
-                <a:solidFill>
-                  <a:srgbClr val="1E2761"/>
-                </a:solidFill>
-                <a:latin typeface="Cambria" pitchFamily="34" charset="0"/>
-                <a:ea typeface="Cambria" pitchFamily="34" charset="-122"/>
-                <a:cs typeface="Cambria" pitchFamily="34" charset="-120"/>
-              </a:rPr>
-              <a:t>Fuentes y referencias recomendadas</a:t>
-            </a:r>
-            <a:endParaRPr lang="en-US" sz="3200" dirty="0"/>
-          </a:p>
-        </p:txBody>
-      </p:sp>
-      <p:sp>
-        <p:nvSpPr>
-          <p:cNvPr id="36" name="Text 27"/>
-          <p:cNvSpPr/>
-          <p:nvPr/>
-        </p:nvSpPr>
-        <p:spPr>
-          <a:xfrm>
-            <a:off x="11365992" y="6446520"/>
-            <a:ext cx="548640" cy="274320"/>
-          </a:xfrm>
-          <a:prstGeom prst="rect">
-            <a:avLst/>
-          </a:prstGeom>
-          <a:noFill/>
-          <a:ln/>
-        </p:spPr>
-        <p:txBody>
-          <a:bodyPr wrap="square" rtlCol="0" anchor="ctr"/>
-          <a:lstStyle/>
-          <a:p>
-            <a:pPr algn="r" indent="0" marL="0">
-              <a:buNone/>
-            </a:pPr>
-            <a:r>
-              <a:rPr lang="en-US" sz="1000" dirty="0">
-                <a:solidFill>
-                  <a:srgbClr val="A6ADC7"/>
-                </a:solidFill>
-                <a:latin typeface="Calibri" pitchFamily="34" charset="0"/>
-                <a:ea typeface="Calibri" pitchFamily="34" charset="-122"/>
-                <a:cs typeface="Calibri" pitchFamily="34" charset="-120"/>
-              </a:rPr>
-              <a:t>07</a:t>
-            </a:r>
-            <a:endParaRPr lang="en-US" sz="1000" dirty="0"/>
-          </a:p>
-        </p:txBody>
-      </p:sp>
-      <p:sp>
-        <p:nvSpPr>
-          <p:cNvPr id="37" name="TextBox 36"/>
-          <p:cNvSpPr txBox="1"/>
-          <p:nvPr/>
-        </p:nvSpPr>
-        <p:spPr>
-          <a:xfrm>
-            <a:off x="640080" y="1691640"/>
-            <a:ext cx="5349240" cy="868680"/>
-          </a:xfrm>
-          <a:prstGeom prst="rect">
-            <a:avLst/>
-          </a:prstGeom>
-          <a:noFill/>
-        </p:spPr>
-        <p:txBody>
-          <a:bodyPr wrap="square">
-            <a:spAutoFit/>
-          </a:bodyPr>
-          <a:lstStyle/>
-          <a:p>
-            <a:pPr>
-              <a:spcAft>
-                <a:spcPts val="400"/>
-              </a:spcAft>
-            </a:pPr>
-            <a:r>
-              <a:rPr sz="1300" b="1" i="0">
-                <a:solidFill>
-                  <a:srgbClr val="1E2761"/>
-                </a:solidFill>
-                <a:latin typeface="Calibri"/>
-              </a:rPr>
-              <a:t>Mántey de Anguiano, G. (2024). Lecciones de Economía Monetaria. UNAM.</a:t>
-            </a:r>
-          </a:p>
-          <a:p>
-            <a:pPr>
-              <a:spcAft>
-                <a:spcPts val="400"/>
-              </a:spcAft>
-            </a:pPr>
-            <a:r>
-              <a:rPr sz="1100" b="0" i="0">
-                <a:solidFill>
-                  <a:srgbClr val="5B6482"/>
-                </a:solidFill>
-                <a:latin typeface="Calibri"/>
-              </a:rPr>
-              <a:t>Lección 2: clasificación de activos y mercado de dinero/capitales.</a:t>
-            </a:r>
-          </a:p>
-        </p:txBody>
-      </p:sp>
-      <p:sp>
-        <p:nvSpPr>
-          <p:cNvPr id="38" name="TextBox 37"/>
-          <p:cNvSpPr txBox="1"/>
-          <p:nvPr/>
-        </p:nvSpPr>
-        <p:spPr>
-          <a:xfrm>
-            <a:off x="6245352" y="1691640"/>
-            <a:ext cx="5349240" cy="868680"/>
-          </a:xfrm>
-          <a:prstGeom prst="rect">
-            <a:avLst/>
-          </a:prstGeom>
-          <a:noFill/>
-        </p:spPr>
-        <p:txBody>
-          <a:bodyPr wrap="square">
-            <a:spAutoFit/>
-          </a:bodyPr>
-          <a:lstStyle/>
-          <a:p>
-            <a:pPr>
-              <a:spcAft>
-                <a:spcPts val="400"/>
-              </a:spcAft>
-            </a:pPr>
-            <a:r>
-              <a:rPr sz="1300" b="1" i="0">
-                <a:solidFill>
-                  <a:srgbClr val="1E2761"/>
-                </a:solidFill>
-                <a:latin typeface="Calibri"/>
-              </a:rPr>
-              <a:t>Mishkin, F. S. y Eakins, S. G. (2014). Financial Markets and Institutions (8ª ed.). Pearson.</a:t>
-            </a:r>
-          </a:p>
-          <a:p>
-            <a:pPr>
-              <a:spcAft>
-                <a:spcPts val="400"/>
-              </a:spcAft>
-            </a:pPr>
-            <a:r>
-              <a:rPr sz="1100" b="0" i="0">
-                <a:solidFill>
-                  <a:srgbClr val="5B6482"/>
-                </a:solidFill>
-                <a:latin typeface="Calibri"/>
-              </a:rPr>
-              <a:t>Cap. 11, "The Money Markets".</a:t>
-            </a:r>
-          </a:p>
-        </p:txBody>
-      </p:sp>
-    </p:spTree>
-  </p:cSld>
-  <p:clrMapOvr>
-    <a:masterClrMapping/>
-  </p:clrMapOvr>
-</p:sld>
-</file>
-
-<file path=ppt/slides/slide8.xml><?xml version="1.0" encoding="utf-8"?>
-<p:sld xmlns:a="http://schemas.openxmlformats.org/drawingml/2006/main" xmlns:p="http://schemas.openxmlformats.org/presentationml/2006/main" xmlns:r="http://schemas.openxmlformats.org/officeDocument/2006/relationships">
-  <p:cSld>
-    <p:spTree>
-      <p:nvGrpSpPr>
-        <p:cNvPr id="1" name=""/>
-        <p:cNvGrpSpPr/>
-        <p:nvPr/>
-      </p:nvGrpSpPr>
-      <p:grpSpPr/>
-      <p:sp>
-        <p:nvSpPr>
-          <p:cNvPr id="2" name="Shape 0"/>
-          <p:cNvSpPr/>
-          <p:nvPr/>
-        </p:nvSpPr>
-        <p:spPr>
-          <a:xfrm>
-            <a:off x="-1828800" y="4389120"/>
-            <a:ext cx="5029200" cy="5029200"/>
-          </a:xfrm>
-          <a:prstGeom prst="ellipse">
-            <a:avLst/>
-          </a:prstGeom>
-          <a:solidFill>
-            <a:srgbClr val="141B4D"/>
-          </a:solidFill>
-          <a:ln/>
-        </p:spPr>
-        <p:txBody>
-          <a:bodyPr/>
-          <a:p/>
-        </p:txBody>
-      </p:sp>
-      <p:sp>
-        <p:nvSpPr>
-          <p:cNvPr id="3" name="Text 1"/>
-          <p:cNvSpPr/>
-          <p:nvPr/>
-        </p:nvSpPr>
-        <p:spPr>
-          <a:xfrm>
-            <a:off x="822960" y="640080"/>
-            <a:ext cx="7315200" cy="365760"/>
-          </a:xfrm>
-          <a:prstGeom prst="rect">
-            <a:avLst/>
-          </a:prstGeom>
-          <a:noFill/>
-          <a:ln/>
-        </p:spPr>
-        <p:txBody>
-          <a:bodyPr wrap="square" rtlCol="0" anchor="ctr"/>
-          <a:lstStyle/>
-          <a:p>
-            <a:pPr indent="0" marL="0">
-              <a:buNone/>
-            </a:pPr>
-            <a:r>
-              <a:rPr lang="en-US" sz="1300" b="1" spc="200" kern="0" dirty="0">
-                <a:solidFill>
-                  <a:srgbClr val="C9A227"/>
-                </a:solidFill>
-                <a:latin typeface="Calibri" pitchFamily="34" charset="0"/>
-                <a:ea typeface="Calibri" pitchFamily="34" charset="-122"/>
-                <a:cs typeface="Calibri" pitchFamily="34" charset="-120"/>
-              </a:rPr>
-              <a:t>CIERRE · CLASIFICACIÓN DE ACTIVOS Y MERCADOS</a:t>
-            </a:r>
-            <a:endParaRPr lang="en-US" sz="1300" dirty="0"/>
-          </a:p>
-        </p:txBody>
-      </p:sp>
-      <p:sp>
-        <p:nvSpPr>
-          <p:cNvPr id="4" name="Text 2"/>
-          <p:cNvSpPr/>
-          <p:nvPr/>
-        </p:nvSpPr>
-        <p:spPr>
-          <a:xfrm>
-            <a:off x="777240" y="1051560"/>
-            <a:ext cx="9601200" cy="822960"/>
-          </a:xfrm>
-          <a:prstGeom prst="rect">
-            <a:avLst/>
-          </a:prstGeom>
-          <a:noFill/>
-          <a:ln/>
-        </p:spPr>
-        <p:txBody>
-          <a:bodyPr wrap="square" lIns="0" tIns="0" rIns="0" bIns="0" rtlCol="0" anchor="ctr"/>
-          <a:lstStyle/>
-          <a:p>
-            <a:pPr indent="0" marL="0">
-              <a:buNone/>
-            </a:pPr>
-            <a:r>
-              <a:rPr lang="en-US" sz="3400" b="1" dirty="0">
-                <a:solidFill>
-                  <a:srgbClr val="FFFFFF"/>
-                </a:solidFill>
-                <a:latin typeface="Cambria" pitchFamily="34" charset="0"/>
-                <a:ea typeface="Cambria" pitchFamily="34" charset="-122"/>
-                <a:cs typeface="Cambria" pitchFamily="34" charset="-120"/>
-              </a:rPr>
-              <a:t>Lo esencial para recordar</a:t>
-            </a:r>
-            <a:endParaRPr lang="en-US" sz="3400" dirty="0"/>
-          </a:p>
-        </p:txBody>
-      </p:sp>
-      <p:sp>
-        <p:nvSpPr>
-          <p:cNvPr id="18" name="TextBox 17"/>
-          <p:cNvSpPr txBox="1"/>
-          <p:nvPr/>
-        </p:nvSpPr>
-        <p:spPr>
-          <a:xfrm>
-            <a:off x="822960" y="1874519"/>
-            <a:ext cx="10332720" cy="868680"/>
-          </a:xfrm>
-          <a:prstGeom prst="rect">
-            <a:avLst/>
-          </a:prstGeom>
-          <a:noFill/>
-        </p:spPr>
-        <p:txBody>
-          <a:bodyPr wrap="square">
-            <a:spAutoFit/>
-          </a:bodyPr>
-          <a:lstStyle/>
-          <a:p>
-            <a:pPr>
-              <a:lnSpc>
-                <a:spcPct val="110000"/>
-              </a:lnSpc>
-            </a:pPr>
-            <a:r>
-              <a:rPr sz="1350" b="0" i="0">
-                <a:solidFill>
-                  <a:srgbClr val="1E2761"/>
-                </a:solidFill>
-                <a:latin typeface="Calibri"/>
-              </a:rPr>
-              <a:t>El activo financiero es deuda directa, deuda indirecta o participación de capital, según quién emite la obligación — no según su plazo.</a:t>
-            </a:r>
-          </a:p>
-        </p:txBody>
-      </p:sp>
-      <p:sp>
-        <p:nvSpPr>
-          <p:cNvPr id="19" name="TextBox 18"/>
-          <p:cNvSpPr txBox="1"/>
-          <p:nvPr/>
-        </p:nvSpPr>
-        <p:spPr>
-          <a:xfrm>
-            <a:off x="822960" y="2834639"/>
-            <a:ext cx="10332720" cy="868680"/>
-          </a:xfrm>
-          <a:prstGeom prst="rect">
-            <a:avLst/>
-          </a:prstGeom>
-          <a:noFill/>
-        </p:spPr>
-        <p:txBody>
-          <a:bodyPr wrap="square">
-            <a:spAutoFit/>
-          </a:bodyPr>
-          <a:lstStyle/>
-          <a:p>
-            <a:pPr>
-              <a:lnSpc>
-                <a:spcPct val="110000"/>
-              </a:lnSpc>
-            </a:pPr>
-            <a:r>
-              <a:rPr sz="1350" b="0" i="0">
-                <a:solidFill>
-                  <a:srgbClr val="1E2761"/>
-                </a:solidFill>
-                <a:latin typeface="Calibri"/>
-              </a:rPr>
-              <a:t>El mercado de dinero (corto plazo, liquidez) y el mercado de capitales (largo plazo, inversión productiva) canalizan el ahorro según el plazo; los derivados son un tercer segmento.</a:t>
-            </a:r>
-          </a:p>
-        </p:txBody>
-      </p:sp>
-      <p:sp>
-        <p:nvSpPr>
-          <p:cNvPr id="20" name="TextBox 19"/>
-          <p:cNvSpPr txBox="1"/>
-          <p:nvPr/>
-        </p:nvSpPr>
-        <p:spPr>
-          <a:xfrm>
-            <a:off x="822960" y="3794759"/>
-            <a:ext cx="10332720" cy="868680"/>
-          </a:xfrm>
-          <a:prstGeom prst="rect">
-            <a:avLst/>
-          </a:prstGeom>
-          <a:noFill/>
-        </p:spPr>
-        <p:txBody>
-          <a:bodyPr wrap="square">
-            <a:spAutoFit/>
-          </a:bodyPr>
-          <a:lstStyle/>
-          <a:p>
-            <a:pPr>
-              <a:lnSpc>
-                <a:spcPct val="110000"/>
-              </a:lnSpc>
-            </a:pPr>
-            <a:r>
-              <a:rPr sz="1350" b="0" i="0">
-                <a:solidFill>
-                  <a:srgbClr val="1E2761"/>
-                </a:solidFill>
-                <a:latin typeface="Calibri"/>
-              </a:rPr>
-              <a:t>Cada agente económico (gobierno, empresas, PyMEs, bancos, personas físicas, institucionales) accede de forma distinta a ambos mercados.</a:t>
-            </a:r>
-          </a:p>
-        </p:txBody>
-      </p:sp>
-      <p:sp>
-        <p:nvSpPr>
-          <p:cNvPr id="21" name="TextBox 20"/>
-          <p:cNvSpPr txBox="1"/>
-          <p:nvPr/>
-        </p:nvSpPr>
-        <p:spPr>
-          <a:xfrm>
-            <a:off x="822960" y="4754879"/>
-            <a:ext cx="10332720" cy="868680"/>
-          </a:xfrm>
-          <a:prstGeom prst="rect">
-            <a:avLst/>
-          </a:prstGeom>
-          <a:noFill/>
-        </p:spPr>
-        <p:txBody>
-          <a:bodyPr wrap="square">
-            <a:spAutoFit/>
-          </a:bodyPr>
-          <a:lstStyle/>
-          <a:p>
-            <a:pPr>
-              <a:lnSpc>
-                <a:spcPct val="110000"/>
-              </a:lnSpc>
-            </a:pPr>
-            <a:r>
-              <a:rPr sz="1350" b="0" i="0">
-                <a:solidFill>
-                  <a:srgbClr val="1E2761"/>
-                </a:solidFill>
-                <a:latin typeface="Calibri"/>
-              </a:rPr>
-              <a:t>Plazo y tipo de emisor son clasificaciones independientes: un instrumento de largo plazo puede seguir siendo deuda indirecta si lo emite un intermediario.</a:t>
             </a:r>
           </a:p>
         </p:txBody>
